--- a/output_pptx/Crown_Him_With_Many_Crowns.pptx
+++ b/output_pptx/Crown_Him_With_Many_Crowns.pptx
@@ -21,6 +21,17 @@
     <p:sldId id="269" r:id="rId20"/>
     <p:sldId id="270" r:id="rId21"/>
     <p:sldId id="271" r:id="rId22"/>
+    <p:sldId id="272" r:id="rId23"/>
+    <p:sldId id="273" r:id="rId24"/>
+    <p:sldId id="274" r:id="rId25"/>
+    <p:sldId id="275" r:id="rId26"/>
+    <p:sldId id="276" r:id="rId27"/>
+    <p:sldId id="277" r:id="rId28"/>
+    <p:sldId id="278" r:id="rId29"/>
+    <p:sldId id="279" r:id="rId30"/>
+    <p:sldId id="280" r:id="rId31"/>
+    <p:sldId id="281" r:id="rId32"/>
+    <p:sldId id="282" r:id="rId33"/>
   </p:sldIdLst>
   <p:sldSz cx="12191695" cy="6858000" type="screen4x3"/>
   <p:notesSz cx="6858000" cy="9144000"/>
@@ -3119,8 +3130,8 @@
         </p:nvSpPr>
         <p:spPr>
           <a:xfrm>
-            <a:off x="594360" y="2258568"/>
-            <a:ext cx="11002975" cy="685800"/>
+            <a:off x="640080" y="2500884"/>
+            <a:ext cx="10911535" cy="731520"/>
           </a:xfrm>
           <a:prstGeom prst="rect">
             <a:avLst/>
@@ -3135,13 +3146,13 @@
           <a:p>
             <a:pPr algn="ctr"/>
             <a:r>
-              <a:rPr sz="4400" b="1" i="0">
+              <a:rPr sz="4800" b="1" i="0">
                 <a:solidFill>
                   <a:srgbClr val="FFFFFF"/>
                 </a:solidFill>
                 <a:latin typeface="Arial"/>
               </a:rPr>
-              <a:t>Coroai o Rei dos Reis</a:t>
+              <a:t>小羊をば　ほめたたえよ！</a:t>
             </a:r>
           </a:p>
         </p:txBody>
@@ -3154,8 +3165,8 @@
         </p:nvSpPr>
         <p:spPr>
           <a:xfrm>
-            <a:off x="594360" y="2980944"/>
-            <a:ext cx="11002975" cy="347472"/>
+            <a:off x="640080" y="3268980"/>
+            <a:ext cx="10911535" cy="365760"/>
           </a:xfrm>
           <a:prstGeom prst="rect">
             <a:avLst/>
@@ -3170,13 +3181,13 @@
           <a:p>
             <a:pPr algn="ctr"/>
             <a:r>
-              <a:rPr sz="2200" b="0" i="1">
-                <a:solidFill>
-                  <a:srgbClr val="8C8C8C"/>
+              <a:rPr sz="2400" b="0" i="1">
+                <a:solidFill>
+                  <a:srgbClr val="AAAAAA"/>
                 </a:solidFill>
                 <a:latin typeface="Arial"/>
               </a:rPr>
-              <a:t/>
+              <a:t>kohitsuji woba hometataeyo !</a:t>
             </a:r>
           </a:p>
         </p:txBody>
@@ -3189,8 +3200,8 @@
         </p:nvSpPr>
         <p:spPr>
           <a:xfrm>
-            <a:off x="594360" y="3529584"/>
-            <a:ext cx="11002975" cy="685800"/>
+            <a:off x="640080" y="4046220"/>
+            <a:ext cx="10911535" cy="310896"/>
           </a:xfrm>
           <a:prstGeom prst="rect">
             <a:avLst/>
@@ -3205,48 +3216,13 @@
           <a:p>
             <a:pPr algn="ctr"/>
             <a:r>
-              <a:rPr sz="4400" b="1" i="0">
-                <a:solidFill>
-                  <a:srgbClr val="FFFFFF"/>
+              <a:rPr sz="2000" b="0" i="1">
+                <a:solidFill>
+                  <a:srgbClr val="828282"/>
                 </a:solidFill>
                 <a:latin typeface="Arial"/>
               </a:rPr>
-              <a:t>O Cordeiro em Seu trono</a:t>
-            </a:r>
-          </a:p>
-        </p:txBody>
-      </p:sp>
-      <p:sp>
-        <p:nvSpPr>
-          <p:cNvPr id="5" name="TextBox 4"/>
-          <p:cNvSpPr txBox="1"/>
-          <p:nvPr/>
-        </p:nvSpPr>
-        <p:spPr>
-          <a:xfrm>
-            <a:off x="594360" y="4251960"/>
-            <a:ext cx="11002975" cy="347472"/>
-          </a:xfrm>
-          <a:prstGeom prst="rect">
-            <a:avLst/>
-          </a:prstGeom>
-          <a:noFill/>
-        </p:spPr>
-        <p:txBody>
-          <a:bodyPr wrap="square">
-            <a:spAutoFit/>
-          </a:bodyPr>
-          <a:lstStyle/>
-          <a:p>
-            <a:pPr algn="ctr"/>
-            <a:r>
-              <a:rPr sz="2200" b="0" i="1">
-                <a:solidFill>
-                  <a:srgbClr val="8C8C8C"/>
-                </a:solidFill>
-                <a:latin typeface="Arial"/>
-              </a:rPr>
-              <a:t/>
+              <a:t>Coroai o Rei dos Reis</a:t>
             </a:r>
           </a:p>
         </p:txBody>
@@ -3285,8 +3261,8 @@
         </p:nvSpPr>
         <p:spPr>
           <a:xfrm>
-            <a:off x="594360" y="2258568"/>
-            <a:ext cx="11002975" cy="685800"/>
+            <a:off x="640080" y="2052828"/>
+            <a:ext cx="10911535" cy="731520"/>
           </a:xfrm>
           <a:prstGeom prst="rect">
             <a:avLst/>
@@ -3301,13 +3277,13 @@
           <a:p>
             <a:pPr algn="ctr"/>
             <a:r>
-              <a:rPr sz="4400" b="1" i="0">
+              <a:rPr sz="4800" b="1" i="0">
                 <a:solidFill>
                   <a:srgbClr val="FFFFFF"/>
                 </a:solidFill>
                 <a:latin typeface="Arial"/>
               </a:rPr>
-              <a:t/>
+              <a:t>Dos favores que Ele deu</a:t>
             </a:r>
           </a:p>
         </p:txBody>
@@ -3320,8 +3296,8 @@
         </p:nvSpPr>
         <p:spPr>
           <a:xfrm>
-            <a:off x="594360" y="2980944"/>
-            <a:ext cx="11002975" cy="347472"/>
+            <a:off x="640080" y="2985516"/>
+            <a:ext cx="10911535" cy="731520"/>
           </a:xfrm>
           <a:prstGeom prst="rect">
             <a:avLst/>
@@ -3336,83 +3312,13 @@
           <a:p>
             <a:pPr algn="ctr"/>
             <a:r>
-              <a:rPr sz="2200" b="0" i="1">
-                <a:solidFill>
-                  <a:srgbClr val="8C8C8C"/>
+              <a:rPr sz="4800" b="1" i="0">
+                <a:solidFill>
+                  <a:srgbClr val="FFFFFF"/>
                 </a:solidFill>
                 <a:latin typeface="Arial"/>
               </a:rPr>
-              <a:t/>
-            </a:r>
-          </a:p>
-        </p:txBody>
-      </p:sp>
-      <p:sp>
-        <p:nvSpPr>
-          <p:cNvPr id="4" name="TextBox 3"/>
-          <p:cNvSpPr txBox="1"/>
-          <p:nvPr/>
-        </p:nvSpPr>
-        <p:spPr>
-          <a:xfrm>
-            <a:off x="594360" y="3529584"/>
-            <a:ext cx="11002975" cy="685800"/>
-          </a:xfrm>
-          <a:prstGeom prst="rect">
-            <a:avLst/>
-          </a:prstGeom>
-          <a:noFill/>
-        </p:spPr>
-        <p:txBody>
-          <a:bodyPr wrap="square">
-            <a:spAutoFit/>
-          </a:bodyPr>
-          <a:lstStyle/>
-          <a:p>
-            <a:pPr algn="ctr"/>
-            <a:r>
-              <a:rPr sz="4400" b="1" i="0">
-                <a:solidFill>
-                  <a:srgbClr val="FFFFFF"/>
-                </a:solidFill>
-                <a:latin typeface="Arial"/>
-              </a:rPr>
-              <a:t/>
-            </a:r>
-          </a:p>
-        </p:txBody>
-      </p:sp>
-      <p:sp>
-        <p:nvSpPr>
-          <p:cNvPr id="5" name="TextBox 4"/>
-          <p:cNvSpPr txBox="1"/>
-          <p:nvPr/>
-        </p:nvSpPr>
-        <p:spPr>
-          <a:xfrm>
-            <a:off x="594360" y="4251960"/>
-            <a:ext cx="11002975" cy="347472"/>
-          </a:xfrm>
-          <a:prstGeom prst="rect">
-            <a:avLst/>
-          </a:prstGeom>
-          <a:noFill/>
-        </p:spPr>
-        <p:txBody>
-          <a:bodyPr wrap="square">
-            <a:spAutoFit/>
-          </a:bodyPr>
-          <a:lstStyle/>
-          <a:p>
-            <a:pPr algn="ctr"/>
-            <a:r>
-              <a:rPr sz="2200" b="0" i="1">
-                <a:solidFill>
-                  <a:srgbClr val="8C8C8C"/>
-                </a:solidFill>
-                <a:latin typeface="Arial"/>
-              </a:rPr>
-              <a:t/>
+              <a:t>Ricos ferimentos ainda visíveis</a:t>
             </a:r>
           </a:p>
         </p:txBody>
@@ -3451,8 +3357,8 @@
         </p:nvSpPr>
         <p:spPr>
           <a:xfrm>
-            <a:off x="594360" y="2258568"/>
-            <a:ext cx="11002975" cy="685800"/>
+            <a:off x="640080" y="2052828"/>
+            <a:ext cx="10911535" cy="731520"/>
           </a:xfrm>
           <a:prstGeom prst="rect">
             <a:avLst/>
@@ -3467,13 +3373,13 @@
           <a:p>
             <a:pPr algn="ctr"/>
             <a:r>
-              <a:rPr sz="4400" b="1" i="0">
+              <a:rPr sz="4800" b="1" i="0">
                 <a:solidFill>
                   <a:srgbClr val="FFFFFF"/>
                 </a:solidFill>
                 <a:latin typeface="Arial"/>
               </a:rPr>
-              <a:t/>
+              <a:t>Em beleza glorificada</a:t>
             </a:r>
           </a:p>
         </p:txBody>
@@ -3486,8 +3392,8 @@
         </p:nvSpPr>
         <p:spPr>
           <a:xfrm>
-            <a:off x="594360" y="2980944"/>
-            <a:ext cx="11002975" cy="347472"/>
+            <a:off x="640080" y="2985516"/>
+            <a:ext cx="10911535" cy="731520"/>
           </a:xfrm>
           <a:prstGeom prst="rect">
             <a:avLst/>
@@ -3502,83 +3408,13 @@
           <a:p>
             <a:pPr algn="ctr"/>
             <a:r>
-              <a:rPr sz="2200" b="0" i="1">
-                <a:solidFill>
-                  <a:srgbClr val="8C8C8C"/>
+              <a:rPr sz="4800" b="1" i="0">
+                <a:solidFill>
+                  <a:srgbClr val="FFFFFF"/>
                 </a:solidFill>
                 <a:latin typeface="Arial"/>
               </a:rPr>
-              <a:t/>
-            </a:r>
-          </a:p>
-        </p:txBody>
-      </p:sp>
-      <p:sp>
-        <p:nvSpPr>
-          <p:cNvPr id="4" name="TextBox 3"/>
-          <p:cNvSpPr txBox="1"/>
-          <p:nvPr/>
-        </p:nvSpPr>
-        <p:spPr>
-          <a:xfrm>
-            <a:off x="594360" y="3529584"/>
-            <a:ext cx="11002975" cy="685800"/>
-          </a:xfrm>
-          <a:prstGeom prst="rect">
-            <a:avLst/>
-          </a:prstGeom>
-          <a:noFill/>
-        </p:spPr>
-        <p:txBody>
-          <a:bodyPr wrap="square">
-            <a:spAutoFit/>
-          </a:bodyPr>
-          <a:lstStyle/>
-          <a:p>
-            <a:pPr algn="ctr"/>
-            <a:r>
-              <a:rPr sz="4400" b="1" i="0">
-                <a:solidFill>
-                  <a:srgbClr val="FFFFFF"/>
-                </a:solidFill>
-                <a:latin typeface="Arial"/>
-              </a:rPr>
-              <a:t/>
-            </a:r>
-          </a:p>
-        </p:txBody>
-      </p:sp>
-      <p:sp>
-        <p:nvSpPr>
-          <p:cNvPr id="5" name="TextBox 4"/>
-          <p:cNvSpPr txBox="1"/>
-          <p:nvPr/>
-        </p:nvSpPr>
-        <p:spPr>
-          <a:xfrm>
-            <a:off x="594360" y="4251960"/>
-            <a:ext cx="11002975" cy="347472"/>
-          </a:xfrm>
-          <a:prstGeom prst="rect">
-            <a:avLst/>
-          </a:prstGeom>
-          <a:noFill/>
-        </p:spPr>
-        <p:txBody>
-          <a:bodyPr wrap="square">
-            <a:spAutoFit/>
-          </a:bodyPr>
-          <a:lstStyle/>
-          <a:p>
-            <a:pPr algn="ctr"/>
-            <a:r>
-              <a:rPr sz="2200" b="0" i="1">
-                <a:solidFill>
-                  <a:srgbClr val="8C8C8C"/>
-                </a:solidFill>
-                <a:latin typeface="Arial"/>
-              </a:rPr>
-              <a:t/>
+              <a:t>Coroai-O com muitas coroas</a:t>
             </a:r>
           </a:p>
         </p:txBody>
@@ -3617,8 +3453,8 @@
         </p:nvSpPr>
         <p:spPr>
           <a:xfrm>
-            <a:off x="594360" y="2258568"/>
-            <a:ext cx="11002975" cy="685800"/>
+            <a:off x="640080" y="2052828"/>
+            <a:ext cx="10911535" cy="731520"/>
           </a:xfrm>
           <a:prstGeom prst="rect">
             <a:avLst/>
@@ -3633,13 +3469,13 @@
           <a:p>
             <a:pPr algn="ctr"/>
             <a:r>
-              <a:rPr sz="4400" b="1" i="0">
+              <a:rPr sz="4800" b="1" i="0">
                 <a:solidFill>
                   <a:srgbClr val="FFFFFF"/>
                 </a:solidFill>
                 <a:latin typeface="Arial"/>
               </a:rPr>
-              <a:t/>
+              <a:t>O Cordeiro em Seu trono</a:t>
             </a:r>
           </a:p>
         </p:txBody>
@@ -3652,8 +3488,8 @@
         </p:nvSpPr>
         <p:spPr>
           <a:xfrm>
-            <a:off x="594360" y="2980944"/>
-            <a:ext cx="11002975" cy="347472"/>
+            <a:off x="640080" y="2985516"/>
+            <a:ext cx="10911535" cy="731520"/>
           </a:xfrm>
           <a:prstGeom prst="rect">
             <a:avLst/>
@@ -3668,83 +3504,13 @@
           <a:p>
             <a:pPr algn="ctr"/>
             <a:r>
-              <a:rPr sz="2200" b="0" i="1">
-                <a:solidFill>
-                  <a:srgbClr val="8C8C8C"/>
+              <a:rPr sz="4800" b="1" i="0">
+                <a:solidFill>
+                  <a:srgbClr val="FFFFFF"/>
                 </a:solidFill>
                 <a:latin typeface="Arial"/>
               </a:rPr>
-              <a:t/>
-            </a:r>
-          </a:p>
-        </p:txBody>
-      </p:sp>
-      <p:sp>
-        <p:nvSpPr>
-          <p:cNvPr id="4" name="TextBox 3"/>
-          <p:cNvSpPr txBox="1"/>
-          <p:nvPr/>
-        </p:nvSpPr>
-        <p:spPr>
-          <a:xfrm>
-            <a:off x="594360" y="3529584"/>
-            <a:ext cx="11002975" cy="685800"/>
-          </a:xfrm>
-          <a:prstGeom prst="rect">
-            <a:avLst/>
-          </a:prstGeom>
-          <a:noFill/>
-        </p:spPr>
-        <p:txBody>
-          <a:bodyPr wrap="square">
-            <a:spAutoFit/>
-          </a:bodyPr>
-          <a:lstStyle/>
-          <a:p>
-            <a:pPr algn="ctr"/>
-            <a:r>
-              <a:rPr sz="4400" b="1" i="0">
-                <a:solidFill>
-                  <a:srgbClr val="FFFFFF"/>
-                </a:solidFill>
-                <a:latin typeface="Arial"/>
-              </a:rPr>
-              <a:t/>
-            </a:r>
-          </a:p>
-        </p:txBody>
-      </p:sp>
-      <p:sp>
-        <p:nvSpPr>
-          <p:cNvPr id="5" name="TextBox 4"/>
-          <p:cNvSpPr txBox="1"/>
-          <p:nvPr/>
-        </p:nvSpPr>
-        <p:spPr>
-          <a:xfrm>
-            <a:off x="594360" y="4251960"/>
-            <a:ext cx="11002975" cy="347472"/>
-          </a:xfrm>
-          <a:prstGeom prst="rect">
-            <a:avLst/>
-          </a:prstGeom>
-          <a:noFill/>
-        </p:spPr>
-        <p:txBody>
-          <a:bodyPr wrap="square">
-            <a:spAutoFit/>
-          </a:bodyPr>
-          <a:lstStyle/>
-          <a:p>
-            <a:pPr algn="ctr"/>
-            <a:r>
-              <a:rPr sz="2200" b="0" i="1">
-                <a:solidFill>
-                  <a:srgbClr val="8C8C8C"/>
-                </a:solidFill>
-                <a:latin typeface="Arial"/>
-              </a:rPr>
-              <a:t/>
+              <a:t>Desperta, minha alma, e canta</a:t>
             </a:r>
           </a:p>
         </p:txBody>
@@ -3783,8 +3549,8 @@
         </p:nvSpPr>
         <p:spPr>
           <a:xfrm>
-            <a:off x="594360" y="2258568"/>
-            <a:ext cx="11002975" cy="685800"/>
+            <a:off x="640080" y="2702052"/>
+            <a:ext cx="10911535" cy="731520"/>
           </a:xfrm>
           <a:prstGeom prst="rect">
             <a:avLst/>
@@ -3799,118 +3565,13 @@
           <a:p>
             <a:pPr algn="ctr"/>
             <a:r>
-              <a:rPr sz="4400" b="1" i="0">
+              <a:rPr sz="4800" b="1" i="0">
                 <a:solidFill>
                   <a:srgbClr val="FFFFFF"/>
                 </a:solidFill>
                 <a:latin typeface="Arial"/>
               </a:rPr>
-              <a:t/>
-            </a:r>
-          </a:p>
-        </p:txBody>
-      </p:sp>
-      <p:sp>
-        <p:nvSpPr>
-          <p:cNvPr id="3" name="TextBox 2"/>
-          <p:cNvSpPr txBox="1"/>
-          <p:nvPr/>
-        </p:nvSpPr>
-        <p:spPr>
-          <a:xfrm>
-            <a:off x="594360" y="2980944"/>
-            <a:ext cx="11002975" cy="347472"/>
-          </a:xfrm>
-          <a:prstGeom prst="rect">
-            <a:avLst/>
-          </a:prstGeom>
-          <a:noFill/>
-        </p:spPr>
-        <p:txBody>
-          <a:bodyPr wrap="square">
-            <a:spAutoFit/>
-          </a:bodyPr>
-          <a:lstStyle/>
-          <a:p>
-            <a:pPr algn="ctr"/>
-            <a:r>
-              <a:rPr sz="2200" b="0" i="1">
-                <a:solidFill>
-                  <a:srgbClr val="8C8C8C"/>
-                </a:solidFill>
-                <a:latin typeface="Arial"/>
-              </a:rPr>
-              <a:t/>
-            </a:r>
-          </a:p>
-        </p:txBody>
-      </p:sp>
-      <p:sp>
-        <p:nvSpPr>
-          <p:cNvPr id="4" name="TextBox 3"/>
-          <p:cNvSpPr txBox="1"/>
-          <p:nvPr/>
-        </p:nvSpPr>
-        <p:spPr>
-          <a:xfrm>
-            <a:off x="594360" y="3529584"/>
-            <a:ext cx="11002975" cy="685800"/>
-          </a:xfrm>
-          <a:prstGeom prst="rect">
-            <a:avLst/>
-          </a:prstGeom>
-          <a:noFill/>
-        </p:spPr>
-        <p:txBody>
-          <a:bodyPr wrap="square">
-            <a:spAutoFit/>
-          </a:bodyPr>
-          <a:lstStyle/>
-          <a:p>
-            <a:pPr algn="ctr"/>
-            <a:r>
-              <a:rPr sz="4400" b="1" i="0">
-                <a:solidFill>
-                  <a:srgbClr val="FFFFFF"/>
-                </a:solidFill>
-                <a:latin typeface="Arial"/>
-              </a:rPr>
-              <a:t/>
-            </a:r>
-          </a:p>
-        </p:txBody>
-      </p:sp>
-      <p:sp>
-        <p:nvSpPr>
-          <p:cNvPr id="5" name="TextBox 4"/>
-          <p:cNvSpPr txBox="1"/>
-          <p:nvPr/>
-        </p:nvSpPr>
-        <p:spPr>
-          <a:xfrm>
-            <a:off x="594360" y="4251960"/>
-            <a:ext cx="11002975" cy="347472"/>
-          </a:xfrm>
-          <a:prstGeom prst="rect">
-            <a:avLst/>
-          </a:prstGeom>
-          <a:noFill/>
-        </p:spPr>
-        <p:txBody>
-          <a:bodyPr wrap="square">
-            <a:spAutoFit/>
-          </a:bodyPr>
-          <a:lstStyle/>
-          <a:p>
-            <a:pPr algn="ctr"/>
-            <a:r>
-              <a:rPr sz="2200" b="0" i="1">
-                <a:solidFill>
-                  <a:srgbClr val="8C8C8C"/>
-                </a:solidFill>
-                <a:latin typeface="Arial"/>
-              </a:rPr>
-              <a:t/>
+              <a:t>Dos favores que Ele deu</a:t>
             </a:r>
           </a:p>
         </p:txBody>
@@ -3949,8 +3610,8 @@
         </p:nvSpPr>
         <p:spPr>
           <a:xfrm>
-            <a:off x="594360" y="2258568"/>
-            <a:ext cx="11002975" cy="685800"/>
+            <a:off x="640080" y="2500884"/>
+            <a:ext cx="10911535" cy="731520"/>
           </a:xfrm>
           <a:prstGeom prst="rect">
             <a:avLst/>
@@ -3965,13 +3626,13 @@
           <a:p>
             <a:pPr algn="ctr"/>
             <a:r>
-              <a:rPr sz="4400" b="1" i="0">
+              <a:rPr sz="4800" b="1" i="0">
                 <a:solidFill>
                   <a:srgbClr val="FFFFFF"/>
                 </a:solidFill>
                 <a:latin typeface="Arial"/>
               </a:rPr>
-              <a:t/>
+              <a:t>主なるイエスを　ほめたたえよ！</a:t>
             </a:r>
           </a:p>
         </p:txBody>
@@ -3984,8 +3645,8 @@
         </p:nvSpPr>
         <p:spPr>
           <a:xfrm>
-            <a:off x="594360" y="2980944"/>
-            <a:ext cx="11002975" cy="347472"/>
+            <a:off x="640080" y="3268980"/>
+            <a:ext cx="10911535" cy="365760"/>
           </a:xfrm>
           <a:prstGeom prst="rect">
             <a:avLst/>
@@ -4000,13 +3661,13 @@
           <a:p>
             <a:pPr algn="ctr"/>
             <a:r>
-              <a:rPr sz="2200" b="0" i="1">
-                <a:solidFill>
-                  <a:srgbClr val="8C8C8C"/>
+              <a:rPr sz="2400" b="0" i="1">
+                <a:solidFill>
+                  <a:srgbClr val="AAAAAA"/>
                 </a:solidFill>
                 <a:latin typeface="Arial"/>
               </a:rPr>
-              <a:t/>
+              <a:t>omona ru iesu wo hometataeyo !</a:t>
             </a:r>
           </a:p>
         </p:txBody>
@@ -4019,8 +3680,8 @@
         </p:nvSpPr>
         <p:spPr>
           <a:xfrm>
-            <a:off x="594360" y="3529584"/>
-            <a:ext cx="11002975" cy="685800"/>
+            <a:off x="640080" y="4046220"/>
+            <a:ext cx="10911535" cy="310896"/>
           </a:xfrm>
           <a:prstGeom prst="rect">
             <a:avLst/>
@@ -4035,48 +3696,13 @@
           <a:p>
             <a:pPr algn="ctr"/>
             <a:r>
-              <a:rPr sz="4400" b="1" i="0">
-                <a:solidFill>
-                  <a:srgbClr val="FFFFFF"/>
+              <a:rPr sz="2000" b="0" i="1">
+                <a:solidFill>
+                  <a:srgbClr val="828282"/>
                 </a:solidFill>
                 <a:latin typeface="Arial"/>
               </a:rPr>
-              <a:t/>
-            </a:r>
-          </a:p>
-        </p:txBody>
-      </p:sp>
-      <p:sp>
-        <p:nvSpPr>
-          <p:cNvPr id="5" name="TextBox 4"/>
-          <p:cNvSpPr txBox="1"/>
-          <p:nvPr/>
-        </p:nvSpPr>
-        <p:spPr>
-          <a:xfrm>
-            <a:off x="594360" y="4251960"/>
-            <a:ext cx="11002975" cy="347472"/>
-          </a:xfrm>
-          <a:prstGeom prst="rect">
-            <a:avLst/>
-          </a:prstGeom>
-          <a:noFill/>
-        </p:spPr>
-        <p:txBody>
-          <a:bodyPr wrap="square">
-            <a:spAutoFit/>
-          </a:bodyPr>
-          <a:lstStyle/>
-          <a:p>
-            <a:pPr algn="ctr"/>
-            <a:r>
-              <a:rPr sz="2200" b="0" i="1">
-                <a:solidFill>
-                  <a:srgbClr val="8C8C8C"/>
-                </a:solidFill>
-                <a:latin typeface="Arial"/>
-              </a:rPr>
-              <a:t/>
+              <a:t>Coroai o Rei dos Reis</a:t>
             </a:r>
           </a:p>
         </p:txBody>
@@ -4115,8 +3741,8 @@
         </p:nvSpPr>
         <p:spPr>
           <a:xfrm>
-            <a:off x="594360" y="2258568"/>
-            <a:ext cx="11002975" cy="685800"/>
+            <a:off x="640080" y="2702052"/>
+            <a:ext cx="10911535" cy="731520"/>
           </a:xfrm>
           <a:prstGeom prst="rect">
             <a:avLst/>
@@ -4131,118 +3757,13 @@
           <a:p>
             <a:pPr algn="ctr"/>
             <a:r>
-              <a:rPr sz="4400" b="1" i="0">
+              <a:rPr sz="4800" b="1" i="0">
                 <a:solidFill>
                   <a:srgbClr val="FFFFFF"/>
                 </a:solidFill>
                 <a:latin typeface="Arial"/>
               </a:rPr>
-              <a:t/>
-            </a:r>
-          </a:p>
-        </p:txBody>
-      </p:sp>
-      <p:sp>
-        <p:nvSpPr>
-          <p:cNvPr id="3" name="TextBox 2"/>
-          <p:cNvSpPr txBox="1"/>
-          <p:nvPr/>
-        </p:nvSpPr>
-        <p:spPr>
-          <a:xfrm>
-            <a:off x="594360" y="2980944"/>
-            <a:ext cx="11002975" cy="347472"/>
-          </a:xfrm>
-          <a:prstGeom prst="rect">
-            <a:avLst/>
-          </a:prstGeom>
-          <a:noFill/>
-        </p:spPr>
-        <p:txBody>
-          <a:bodyPr wrap="square">
-            <a:spAutoFit/>
-          </a:bodyPr>
-          <a:lstStyle/>
-          <a:p>
-            <a:pPr algn="ctr"/>
-            <a:r>
-              <a:rPr sz="2200" b="0" i="1">
-                <a:solidFill>
-                  <a:srgbClr val="8C8C8C"/>
-                </a:solidFill>
-                <a:latin typeface="Arial"/>
-              </a:rPr>
-              <a:t/>
-            </a:r>
-          </a:p>
-        </p:txBody>
-      </p:sp>
-      <p:sp>
-        <p:nvSpPr>
-          <p:cNvPr id="4" name="TextBox 3"/>
-          <p:cNvSpPr txBox="1"/>
-          <p:nvPr/>
-        </p:nvSpPr>
-        <p:spPr>
-          <a:xfrm>
-            <a:off x="594360" y="3529584"/>
-            <a:ext cx="11002975" cy="685800"/>
-          </a:xfrm>
-          <a:prstGeom prst="rect">
-            <a:avLst/>
-          </a:prstGeom>
-          <a:noFill/>
-        </p:spPr>
-        <p:txBody>
-          <a:bodyPr wrap="square">
-            <a:spAutoFit/>
-          </a:bodyPr>
-          <a:lstStyle/>
-          <a:p>
-            <a:pPr algn="ctr"/>
-            <a:r>
-              <a:rPr sz="4400" b="1" i="0">
-                <a:solidFill>
-                  <a:srgbClr val="FFFFFF"/>
-                </a:solidFill>
-                <a:latin typeface="Arial"/>
-              </a:rPr>
-              <a:t/>
-            </a:r>
-          </a:p>
-        </p:txBody>
-      </p:sp>
-      <p:sp>
-        <p:nvSpPr>
-          <p:cNvPr id="5" name="TextBox 4"/>
-          <p:cNvSpPr txBox="1"/>
-          <p:nvPr/>
-        </p:nvSpPr>
-        <p:spPr>
-          <a:xfrm>
-            <a:off x="594360" y="4251960"/>
-            <a:ext cx="11002975" cy="347472"/>
-          </a:xfrm>
-          <a:prstGeom prst="rect">
-            <a:avLst/>
-          </a:prstGeom>
-          <a:noFill/>
-        </p:spPr>
-        <p:txBody>
-          <a:bodyPr wrap="square">
-            <a:spAutoFit/>
-          </a:bodyPr>
-          <a:lstStyle/>
-          <a:p>
-            <a:pPr algn="ctr"/>
-            <a:r>
-              <a:rPr sz="2200" b="0" i="1">
-                <a:solidFill>
-                  <a:srgbClr val="8C8C8C"/>
-                </a:solidFill>
-                <a:latin typeface="Arial"/>
-              </a:rPr>
-              <a:t/>
+              <a:t>Coroai-O Senhor da vida</a:t>
             </a:r>
           </a:p>
         </p:txBody>
@@ -4281,8 +3802,8 @@
         </p:nvSpPr>
         <p:spPr>
           <a:xfrm>
-            <a:off x="594360" y="2258568"/>
-            <a:ext cx="11002975" cy="685800"/>
+            <a:off x="640080" y="2500884"/>
+            <a:ext cx="10911535" cy="731520"/>
           </a:xfrm>
           <a:prstGeom prst="rect">
             <a:avLst/>
@@ -4297,13 +3818,13 @@
           <a:p>
             <a:pPr algn="ctr"/>
             <a:r>
-              <a:rPr sz="4400" b="1" i="0">
+              <a:rPr sz="4800" b="1" i="0">
                 <a:solidFill>
                   <a:srgbClr val="FFFFFF"/>
                 </a:solidFill>
                 <a:latin typeface="Arial"/>
               </a:rPr>
-              <a:t/>
+              <a:t>我らの苦しみ　負いしイエスを。</a:t>
             </a:r>
           </a:p>
         </p:txBody>
@@ -4316,8 +3837,8 @@
         </p:nvSpPr>
         <p:spPr>
           <a:xfrm>
-            <a:off x="594360" y="2980944"/>
-            <a:ext cx="11002975" cy="347472"/>
+            <a:off x="640080" y="3268980"/>
+            <a:ext cx="10911535" cy="365760"/>
           </a:xfrm>
           <a:prstGeom prst="rect">
             <a:avLst/>
@@ -4332,13 +3853,13 @@
           <a:p>
             <a:pPr algn="ctr"/>
             <a:r>
-              <a:rPr sz="2200" b="0" i="1">
-                <a:solidFill>
-                  <a:srgbClr val="8C8C8C"/>
+              <a:rPr sz="2400" b="0" i="1">
+                <a:solidFill>
+                  <a:srgbClr val="AAAAAA"/>
                 </a:solidFill>
                 <a:latin typeface="Arial"/>
               </a:rPr>
-              <a:t/>
+              <a:t>warera no kurushi mi oi shi iesu wo .</a:t>
             </a:r>
           </a:p>
         </p:txBody>
@@ -4351,8 +3872,8 @@
         </p:nvSpPr>
         <p:spPr>
           <a:xfrm>
-            <a:off x="594360" y="3529584"/>
-            <a:ext cx="11002975" cy="685800"/>
+            <a:off x="640080" y="4046220"/>
+            <a:ext cx="10911535" cy="310896"/>
           </a:xfrm>
           <a:prstGeom prst="rect">
             <a:avLst/>
@@ -4367,27 +3888,53 @@
           <a:p>
             <a:pPr algn="ctr"/>
             <a:r>
-              <a:rPr sz="4400" b="1" i="0">
-                <a:solidFill>
-                  <a:srgbClr val="FFFFFF"/>
+              <a:rPr sz="2000" b="0" i="1">
+                <a:solidFill>
+                  <a:srgbClr val="828282"/>
                 </a:solidFill>
                 <a:latin typeface="Arial"/>
               </a:rPr>
-              <a:t/>
-            </a:r>
-          </a:p>
-        </p:txBody>
-      </p:sp>
-      <p:sp>
-        <p:nvSpPr>
-          <p:cNvPr id="5" name="TextBox 4"/>
+              <a:t>Coroai o Rei dos Reis</a:t>
+            </a:r>
+          </a:p>
+        </p:txBody>
+      </p:sp>
+    </p:spTree>
+  </p:cSld>
+  <p:clrMapOvr>
+    <a:masterClrMapping/>
+  </p:clrMapOvr>
+</p:sld>
+</file>
+
+<file path=ppt/slides/slide17.xml><?xml version="1.0" encoding="utf-8"?>
+<p:sld xmlns:a="http://schemas.openxmlformats.org/drawingml/2006/main" xmlns:p="http://schemas.openxmlformats.org/presentationml/2006/main" xmlns:r="http://schemas.openxmlformats.org/officeDocument/2006/relationships">
+  <p:cSld>
+    <p:bg>
+      <p:bgPr>
+        <a:solidFill>
+          <a:srgbClr val="000000"/>
+        </a:solidFill>
+        <a:effectLst/>
+      </p:bgPr>
+    </p:bg>
+    <p:spTree>
+      <p:nvGrpSpPr>
+        <p:cNvPr id="1" name=""/>
+        <p:cNvGrpSpPr/>
+        <p:nvPr/>
+      </p:nvGrpSpPr>
+      <p:grpSpPr/>
+      <p:sp>
+        <p:nvSpPr>
+          <p:cNvPr id="2" name="TextBox 1"/>
           <p:cNvSpPr txBox="1"/>
           <p:nvPr/>
         </p:nvSpPr>
         <p:spPr>
           <a:xfrm>
-            <a:off x="594360" y="4251960"/>
-            <a:ext cx="11002975" cy="347472"/>
+            <a:off x="640080" y="2702052"/>
+            <a:ext cx="10911535" cy="731520"/>
           </a:xfrm>
           <a:prstGeom prst="rect">
             <a:avLst/>
@@ -4402,13 +3949,205 @@
           <a:p>
             <a:pPr algn="ctr"/>
             <a:r>
-              <a:rPr sz="2200" b="0" i="1">
-                <a:solidFill>
-                  <a:srgbClr val="8C8C8C"/>
+              <a:rPr sz="4800" b="1" i="0">
+                <a:solidFill>
+                  <a:srgbClr val="FFFFFF"/>
                 </a:solidFill>
                 <a:latin typeface="Arial"/>
               </a:rPr>
-              <a:t/>
+              <a:t>Que triunfou sobre a cova</a:t>
+            </a:r>
+          </a:p>
+        </p:txBody>
+      </p:sp>
+    </p:spTree>
+  </p:cSld>
+  <p:clrMapOvr>
+    <a:masterClrMapping/>
+  </p:clrMapOvr>
+</p:sld>
+</file>
+
+<file path=ppt/slides/slide18.xml><?xml version="1.0" encoding="utf-8"?>
+<p:sld xmlns:a="http://schemas.openxmlformats.org/drawingml/2006/main" xmlns:p="http://schemas.openxmlformats.org/presentationml/2006/main" xmlns:r="http://schemas.openxmlformats.org/officeDocument/2006/relationships">
+  <p:cSld>
+    <p:bg>
+      <p:bgPr>
+        <a:solidFill>
+          <a:srgbClr val="000000"/>
+        </a:solidFill>
+        <a:effectLst/>
+      </p:bgPr>
+    </p:bg>
+    <p:spTree>
+      <p:nvGrpSpPr>
+        <p:cNvPr id="1" name=""/>
+        <p:cNvGrpSpPr/>
+        <p:nvPr/>
+      </p:nvGrpSpPr>
+      <p:grpSpPr/>
+      <p:sp>
+        <p:nvSpPr>
+          <p:cNvPr id="2" name="TextBox 1"/>
+          <p:cNvSpPr txBox="1"/>
+          <p:nvPr/>
+        </p:nvSpPr>
+        <p:spPr>
+          <a:xfrm>
+            <a:off x="640080" y="2500884"/>
+            <a:ext cx="10911535" cy="731520"/>
+          </a:xfrm>
+          <a:prstGeom prst="rect">
+            <a:avLst/>
+          </a:prstGeom>
+          <a:noFill/>
+        </p:spPr>
+        <p:txBody>
+          <a:bodyPr wrap="square">
+            <a:spAutoFit/>
+          </a:bodyPr>
+          <a:lstStyle/>
+          <a:p>
+            <a:pPr algn="ctr"/>
+            <a:r>
+              <a:rPr sz="4800" b="1" i="0">
+                <a:solidFill>
+                  <a:srgbClr val="FFFFFF"/>
+                </a:solidFill>
+                <a:latin typeface="Arial"/>
+              </a:rPr>
+              <a:t>十字架の血の　救いの主に</a:t>
+            </a:r>
+          </a:p>
+        </p:txBody>
+      </p:sp>
+      <p:sp>
+        <p:nvSpPr>
+          <p:cNvPr id="3" name="TextBox 2"/>
+          <p:cNvSpPr txBox="1"/>
+          <p:nvPr/>
+        </p:nvSpPr>
+        <p:spPr>
+          <a:xfrm>
+            <a:off x="640080" y="3268980"/>
+            <a:ext cx="10911535" cy="365760"/>
+          </a:xfrm>
+          <a:prstGeom prst="rect">
+            <a:avLst/>
+          </a:prstGeom>
+          <a:noFill/>
+        </p:spPr>
+        <p:txBody>
+          <a:bodyPr wrap="square">
+            <a:spAutoFit/>
+          </a:bodyPr>
+          <a:lstStyle/>
+          <a:p>
+            <a:pPr algn="ctr"/>
+            <a:r>
+              <a:rPr sz="2400" b="0" i="1">
+                <a:solidFill>
+                  <a:srgbClr val="AAAAAA"/>
+                </a:solidFill>
+                <a:latin typeface="Arial"/>
+              </a:rPr>
+              <a:t>juujika no chi no sukui no omoni</a:t>
+            </a:r>
+          </a:p>
+        </p:txBody>
+      </p:sp>
+      <p:sp>
+        <p:nvSpPr>
+          <p:cNvPr id="4" name="TextBox 3"/>
+          <p:cNvSpPr txBox="1"/>
+          <p:nvPr/>
+        </p:nvSpPr>
+        <p:spPr>
+          <a:xfrm>
+            <a:off x="640080" y="4046220"/>
+            <a:ext cx="10911535" cy="310896"/>
+          </a:xfrm>
+          <a:prstGeom prst="rect">
+            <a:avLst/>
+          </a:prstGeom>
+          <a:noFill/>
+        </p:spPr>
+        <p:txBody>
+          <a:bodyPr wrap="square">
+            <a:spAutoFit/>
+          </a:bodyPr>
+          <a:lstStyle/>
+          <a:p>
+            <a:pPr algn="ctr"/>
+            <a:r>
+              <a:rPr sz="2000" b="0" i="1">
+                <a:solidFill>
+                  <a:srgbClr val="828282"/>
+                </a:solidFill>
+                <a:latin typeface="Arial"/>
+              </a:rPr>
+              <a:t>Coroai o Rei dos Reis</a:t>
+            </a:r>
+          </a:p>
+        </p:txBody>
+      </p:sp>
+    </p:spTree>
+  </p:cSld>
+  <p:clrMapOvr>
+    <a:masterClrMapping/>
+  </p:clrMapOvr>
+</p:sld>
+</file>
+
+<file path=ppt/slides/slide19.xml><?xml version="1.0" encoding="utf-8"?>
+<p:sld xmlns:a="http://schemas.openxmlformats.org/drawingml/2006/main" xmlns:p="http://schemas.openxmlformats.org/presentationml/2006/main" xmlns:r="http://schemas.openxmlformats.org/officeDocument/2006/relationships">
+  <p:cSld>
+    <p:bg>
+      <p:bgPr>
+        <a:solidFill>
+          <a:srgbClr val="000000"/>
+        </a:solidFill>
+        <a:effectLst/>
+      </p:bgPr>
+    </p:bg>
+    <p:spTree>
+      <p:nvGrpSpPr>
+        <p:cNvPr id="1" name=""/>
+        <p:cNvGrpSpPr/>
+        <p:nvPr/>
+      </p:nvGrpSpPr>
+      <p:grpSpPr/>
+      <p:sp>
+        <p:nvSpPr>
+          <p:cNvPr id="2" name="TextBox 1"/>
+          <p:cNvSpPr txBox="1"/>
+          <p:nvPr/>
+        </p:nvSpPr>
+        <p:spPr>
+          <a:xfrm>
+            <a:off x="640080" y="2702052"/>
+            <a:ext cx="10911535" cy="731520"/>
+          </a:xfrm>
+          <a:prstGeom prst="rect">
+            <a:avLst/>
+          </a:prstGeom>
+          <a:noFill/>
+        </p:spPr>
+        <p:txBody>
+          <a:bodyPr wrap="square">
+            <a:spAutoFit/>
+          </a:bodyPr>
+          <a:lstStyle/>
+          <a:p>
+            <a:pPr algn="ctr"/>
+            <a:r>
+              <a:rPr sz="4800" b="1" i="0">
+                <a:solidFill>
+                  <a:srgbClr val="FFFFFF"/>
+                </a:solidFill>
+                <a:latin typeface="Arial"/>
+              </a:rPr>
+              <a:t>Desperta, minha alma, e canta</a:t>
             </a:r>
           </a:p>
         </p:txBody>
@@ -4447,8 +4186,8 @@
         </p:nvSpPr>
         <p:spPr>
           <a:xfrm>
-            <a:off x="594360" y="2258568"/>
-            <a:ext cx="11002975" cy="685800"/>
+            <a:off x="640080" y="2702052"/>
+            <a:ext cx="10911535" cy="731520"/>
           </a:xfrm>
           <a:prstGeom prst="rect">
             <a:avLst/>
@@ -4463,27 +4202,53 @@
           <a:p>
             <a:pPr algn="ctr"/>
             <a:r>
-              <a:rPr sz="4400" b="1" i="0">
+              <a:rPr sz="4800" b="1" i="0">
                 <a:solidFill>
                   <a:srgbClr val="FFFFFF"/>
                 </a:solidFill>
                 <a:latin typeface="Arial"/>
               </a:rPr>
-              <a:t>Enquanto a música celestial</a:t>
-            </a:r>
-          </a:p>
-        </p:txBody>
-      </p:sp>
-      <p:sp>
-        <p:nvSpPr>
-          <p:cNvPr id="3" name="TextBox 2"/>
+              <a:t>Coroai o Rei dos Reis</a:t>
+            </a:r>
+          </a:p>
+        </p:txBody>
+      </p:sp>
+    </p:spTree>
+  </p:cSld>
+  <p:clrMapOvr>
+    <a:masterClrMapping/>
+  </p:clrMapOvr>
+</p:sld>
+</file>
+
+<file path=ppt/slides/slide20.xml><?xml version="1.0" encoding="utf-8"?>
+<p:sld xmlns:a="http://schemas.openxmlformats.org/drawingml/2006/main" xmlns:p="http://schemas.openxmlformats.org/presentationml/2006/main" xmlns:r="http://schemas.openxmlformats.org/officeDocument/2006/relationships">
+  <p:cSld>
+    <p:bg>
+      <p:bgPr>
+        <a:solidFill>
+          <a:srgbClr val="000000"/>
+        </a:solidFill>
+        <a:effectLst/>
+      </p:bgPr>
+    </p:bg>
+    <p:spTree>
+      <p:nvGrpSpPr>
+        <p:cNvPr id="1" name=""/>
+        <p:cNvGrpSpPr/>
+        <p:nvPr/>
+      </p:nvGrpSpPr>
+      <p:grpSpPr/>
+      <p:sp>
+        <p:nvSpPr>
+          <p:cNvPr id="2" name="TextBox 1"/>
           <p:cNvSpPr txBox="1"/>
           <p:nvPr/>
         </p:nvSpPr>
         <p:spPr>
           <a:xfrm>
-            <a:off x="594360" y="2980944"/>
-            <a:ext cx="11002975" cy="347472"/>
+            <a:off x="640080" y="2500884"/>
+            <a:ext cx="10911535" cy="731520"/>
           </a:xfrm>
           <a:prstGeom prst="rect">
             <a:avLst/>
@@ -4498,27 +4263,27 @@
           <a:p>
             <a:pPr algn="ctr"/>
             <a:r>
-              <a:rPr sz="2200" b="0" i="1">
-                <a:solidFill>
-                  <a:srgbClr val="8C8C8C"/>
+              <a:rPr sz="4800" b="1" i="0">
+                <a:solidFill>
+                  <a:srgbClr val="FFFFFF"/>
                 </a:solidFill>
                 <a:latin typeface="Arial"/>
               </a:rPr>
-              <a:t/>
-            </a:r>
-          </a:p>
-        </p:txBody>
-      </p:sp>
-      <p:sp>
-        <p:nvSpPr>
-          <p:cNvPr id="4" name="TextBox 3"/>
+              <a:t>栄えのかむりを　ささげ歌わん。</a:t>
+            </a:r>
+          </a:p>
+        </p:txBody>
+      </p:sp>
+      <p:sp>
+        <p:nvSpPr>
+          <p:cNvPr id="3" name="TextBox 2"/>
           <p:cNvSpPr txBox="1"/>
           <p:nvPr/>
         </p:nvSpPr>
         <p:spPr>
           <a:xfrm>
-            <a:off x="594360" y="3529584"/>
-            <a:ext cx="11002975" cy="685800"/>
+            <a:off x="640080" y="3268980"/>
+            <a:ext cx="10911535" cy="365760"/>
           </a:xfrm>
           <a:prstGeom prst="rect">
             <a:avLst/>
@@ -4533,27 +4298,27 @@
           <a:p>
             <a:pPr algn="ctr"/>
             <a:r>
-              <a:rPr sz="4400" b="1" i="0">
-                <a:solidFill>
-                  <a:srgbClr val="FFFFFF"/>
+              <a:rPr sz="2400" b="0" i="1">
+                <a:solidFill>
+                  <a:srgbClr val="AAAAAA"/>
                 </a:solidFill>
                 <a:latin typeface="Arial"/>
               </a:rPr>
-              <a:t>Ressoa ao redor do nome</a:t>
-            </a:r>
-          </a:p>
-        </p:txBody>
-      </p:sp>
-      <p:sp>
-        <p:nvSpPr>
-          <p:cNvPr id="5" name="TextBox 4"/>
+              <a:t>sakae nokamuriwo sasage utawa n .</a:t>
+            </a:r>
+          </a:p>
+        </p:txBody>
+      </p:sp>
+      <p:sp>
+        <p:nvSpPr>
+          <p:cNvPr id="4" name="TextBox 3"/>
           <p:cNvSpPr txBox="1"/>
           <p:nvPr/>
         </p:nvSpPr>
         <p:spPr>
           <a:xfrm>
-            <a:off x="594360" y="4251960"/>
-            <a:ext cx="11002975" cy="347472"/>
+            <a:off x="640080" y="4046220"/>
+            <a:ext cx="10911535" cy="310896"/>
           </a:xfrm>
           <a:prstGeom prst="rect">
             <a:avLst/>
@@ -4568,9 +4333,681 @@
           <a:p>
             <a:pPr algn="ctr"/>
             <a:r>
-              <a:rPr sz="2200" b="0" i="1">
-                <a:solidFill>
-                  <a:srgbClr val="8C8C8C"/>
+              <a:rPr sz="2000" b="0" i="1">
+                <a:solidFill>
+                  <a:srgbClr val="828282"/>
+                </a:solidFill>
+                <a:latin typeface="Arial"/>
+              </a:rPr>
+              <a:t>Coroai o Rei dos Reis</a:t>
+            </a:r>
+          </a:p>
+        </p:txBody>
+      </p:sp>
+    </p:spTree>
+  </p:cSld>
+  <p:clrMapOvr>
+    <a:masterClrMapping/>
+  </p:clrMapOvr>
+</p:sld>
+</file>
+
+<file path=ppt/slides/slide21.xml><?xml version="1.0" encoding="utf-8"?>
+<p:sld xmlns:a="http://schemas.openxmlformats.org/drawingml/2006/main" xmlns:p="http://schemas.openxmlformats.org/presentationml/2006/main" xmlns:r="http://schemas.openxmlformats.org/officeDocument/2006/relationships">
+  <p:cSld>
+    <p:bg>
+      <p:bgPr>
+        <a:solidFill>
+          <a:srgbClr val="000000"/>
+        </a:solidFill>
+        <a:effectLst/>
+      </p:bgPr>
+    </p:bg>
+    <p:spTree>
+      <p:nvGrpSpPr>
+        <p:cNvPr id="1" name=""/>
+        <p:cNvGrpSpPr/>
+        <p:nvPr/>
+      </p:nvGrpSpPr>
+      <p:grpSpPr/>
+      <p:sp>
+        <p:nvSpPr>
+          <p:cNvPr id="2" name="TextBox 1"/>
+          <p:cNvSpPr txBox="1"/>
+          <p:nvPr/>
+        </p:nvSpPr>
+        <p:spPr>
+          <a:xfrm>
+            <a:off x="640080" y="2052828"/>
+            <a:ext cx="10911535" cy="731520"/>
+          </a:xfrm>
+          <a:prstGeom prst="rect">
+            <a:avLst/>
+          </a:prstGeom>
+          <a:noFill/>
+        </p:spPr>
+        <p:txBody>
+          <a:bodyPr wrap="square">
+            <a:spAutoFit/>
+          </a:bodyPr>
+          <a:lstStyle/>
+          <a:p>
+            <a:pPr algn="ctr"/>
+            <a:r>
+              <a:rPr sz="4800" b="1" i="0">
+                <a:solidFill>
+                  <a:srgbClr val="FFFFFF"/>
+                </a:solidFill>
+                <a:latin typeface="Arial"/>
+              </a:rPr>
+              <a:t/>
+            </a:r>
+          </a:p>
+        </p:txBody>
+      </p:sp>
+      <p:sp>
+        <p:nvSpPr>
+          <p:cNvPr id="3" name="TextBox 2"/>
+          <p:cNvSpPr txBox="1"/>
+          <p:nvPr/>
+        </p:nvSpPr>
+        <p:spPr>
+          <a:xfrm>
+            <a:off x="640080" y="2985516"/>
+            <a:ext cx="10911535" cy="731520"/>
+          </a:xfrm>
+          <a:prstGeom prst="rect">
+            <a:avLst/>
+          </a:prstGeom>
+          <a:noFill/>
+        </p:spPr>
+        <p:txBody>
+          <a:bodyPr wrap="square">
+            <a:spAutoFit/>
+          </a:bodyPr>
+          <a:lstStyle/>
+          <a:p>
+            <a:pPr algn="ctr"/>
+            <a:r>
+              <a:rPr sz="4800" b="1" i="0">
+                <a:solidFill>
+                  <a:srgbClr val="FFFFFF"/>
+                </a:solidFill>
+                <a:latin typeface="Arial"/>
+              </a:rPr>
+              <a:t/>
+            </a:r>
+          </a:p>
+        </p:txBody>
+      </p:sp>
+    </p:spTree>
+  </p:cSld>
+  <p:clrMapOvr>
+    <a:masterClrMapping/>
+  </p:clrMapOvr>
+</p:sld>
+</file>
+
+<file path=ppt/slides/slide22.xml><?xml version="1.0" encoding="utf-8"?>
+<p:sld xmlns:a="http://schemas.openxmlformats.org/drawingml/2006/main" xmlns:p="http://schemas.openxmlformats.org/presentationml/2006/main" xmlns:r="http://schemas.openxmlformats.org/officeDocument/2006/relationships">
+  <p:cSld>
+    <p:bg>
+      <p:bgPr>
+        <a:solidFill>
+          <a:srgbClr val="000000"/>
+        </a:solidFill>
+        <a:effectLst/>
+      </p:bgPr>
+    </p:bg>
+    <p:spTree>
+      <p:nvGrpSpPr>
+        <p:cNvPr id="1" name=""/>
+        <p:cNvGrpSpPr/>
+        <p:nvPr/>
+      </p:nvGrpSpPr>
+      <p:grpSpPr/>
+      <p:sp>
+        <p:nvSpPr>
+          <p:cNvPr id="2" name="TextBox 1"/>
+          <p:cNvSpPr txBox="1"/>
+          <p:nvPr/>
+        </p:nvSpPr>
+        <p:spPr>
+          <a:xfrm>
+            <a:off x="640080" y="2052828"/>
+            <a:ext cx="10911535" cy="731520"/>
+          </a:xfrm>
+          <a:prstGeom prst="rect">
+            <a:avLst/>
+          </a:prstGeom>
+          <a:noFill/>
+        </p:spPr>
+        <p:txBody>
+          <a:bodyPr wrap="square">
+            <a:spAutoFit/>
+          </a:bodyPr>
+          <a:lstStyle/>
+          <a:p>
+            <a:pPr algn="ctr"/>
+            <a:r>
+              <a:rPr sz="4800" b="1" i="0">
+                <a:solidFill>
+                  <a:srgbClr val="FFFFFF"/>
+                </a:solidFill>
+                <a:latin typeface="Arial"/>
+              </a:rPr>
+              <a:t/>
+            </a:r>
+          </a:p>
+        </p:txBody>
+      </p:sp>
+      <p:sp>
+        <p:nvSpPr>
+          <p:cNvPr id="3" name="TextBox 2"/>
+          <p:cNvSpPr txBox="1"/>
+          <p:nvPr/>
+        </p:nvSpPr>
+        <p:spPr>
+          <a:xfrm>
+            <a:off x="640080" y="2985516"/>
+            <a:ext cx="10911535" cy="731520"/>
+          </a:xfrm>
+          <a:prstGeom prst="rect">
+            <a:avLst/>
+          </a:prstGeom>
+          <a:noFill/>
+        </p:spPr>
+        <p:txBody>
+          <a:bodyPr wrap="square">
+            <a:spAutoFit/>
+          </a:bodyPr>
+          <a:lstStyle/>
+          <a:p>
+            <a:pPr algn="ctr"/>
+            <a:r>
+              <a:rPr sz="4800" b="1" i="0">
+                <a:solidFill>
+                  <a:srgbClr val="FFFFFF"/>
+                </a:solidFill>
+                <a:latin typeface="Arial"/>
+              </a:rPr>
+              <a:t/>
+            </a:r>
+          </a:p>
+        </p:txBody>
+      </p:sp>
+    </p:spTree>
+  </p:cSld>
+  <p:clrMapOvr>
+    <a:masterClrMapping/>
+  </p:clrMapOvr>
+</p:sld>
+</file>
+
+<file path=ppt/slides/slide23.xml><?xml version="1.0" encoding="utf-8"?>
+<p:sld xmlns:a="http://schemas.openxmlformats.org/drawingml/2006/main" xmlns:p="http://schemas.openxmlformats.org/presentationml/2006/main" xmlns:r="http://schemas.openxmlformats.org/officeDocument/2006/relationships">
+  <p:cSld>
+    <p:bg>
+      <p:bgPr>
+        <a:solidFill>
+          <a:srgbClr val="000000"/>
+        </a:solidFill>
+        <a:effectLst/>
+      </p:bgPr>
+    </p:bg>
+    <p:spTree>
+      <p:nvGrpSpPr>
+        <p:cNvPr id="1" name=""/>
+        <p:cNvGrpSpPr/>
+        <p:nvPr/>
+      </p:nvGrpSpPr>
+      <p:grpSpPr/>
+      <p:sp>
+        <p:nvSpPr>
+          <p:cNvPr id="2" name="TextBox 1"/>
+          <p:cNvSpPr txBox="1"/>
+          <p:nvPr/>
+        </p:nvSpPr>
+        <p:spPr>
+          <a:xfrm>
+            <a:off x="640080" y="2052828"/>
+            <a:ext cx="10911535" cy="731520"/>
+          </a:xfrm>
+          <a:prstGeom prst="rect">
+            <a:avLst/>
+          </a:prstGeom>
+          <a:noFill/>
+        </p:spPr>
+        <p:txBody>
+          <a:bodyPr wrap="square">
+            <a:spAutoFit/>
+          </a:bodyPr>
+          <a:lstStyle/>
+          <a:p>
+            <a:pPr algn="ctr"/>
+            <a:r>
+              <a:rPr sz="4800" b="1" i="0">
+                <a:solidFill>
+                  <a:srgbClr val="FFFFFF"/>
+                </a:solidFill>
+                <a:latin typeface="Arial"/>
+              </a:rPr>
+              <a:t/>
+            </a:r>
+          </a:p>
+        </p:txBody>
+      </p:sp>
+      <p:sp>
+        <p:nvSpPr>
+          <p:cNvPr id="3" name="TextBox 2"/>
+          <p:cNvSpPr txBox="1"/>
+          <p:nvPr/>
+        </p:nvSpPr>
+        <p:spPr>
+          <a:xfrm>
+            <a:off x="640080" y="2985516"/>
+            <a:ext cx="10911535" cy="731520"/>
+          </a:xfrm>
+          <a:prstGeom prst="rect">
+            <a:avLst/>
+          </a:prstGeom>
+          <a:noFill/>
+        </p:spPr>
+        <p:txBody>
+          <a:bodyPr wrap="square">
+            <a:spAutoFit/>
+          </a:bodyPr>
+          <a:lstStyle/>
+          <a:p>
+            <a:pPr algn="ctr"/>
+            <a:r>
+              <a:rPr sz="4800" b="1" i="0">
+                <a:solidFill>
+                  <a:srgbClr val="FFFFFF"/>
+                </a:solidFill>
+                <a:latin typeface="Arial"/>
+              </a:rPr>
+              <a:t/>
+            </a:r>
+          </a:p>
+        </p:txBody>
+      </p:sp>
+    </p:spTree>
+  </p:cSld>
+  <p:clrMapOvr>
+    <a:masterClrMapping/>
+  </p:clrMapOvr>
+</p:sld>
+</file>
+
+<file path=ppt/slides/slide24.xml><?xml version="1.0" encoding="utf-8"?>
+<p:sld xmlns:a="http://schemas.openxmlformats.org/drawingml/2006/main" xmlns:p="http://schemas.openxmlformats.org/presentationml/2006/main" xmlns:r="http://schemas.openxmlformats.org/officeDocument/2006/relationships">
+  <p:cSld>
+    <p:bg>
+      <p:bgPr>
+        <a:solidFill>
+          <a:srgbClr val="000000"/>
+        </a:solidFill>
+        <a:effectLst/>
+      </p:bgPr>
+    </p:bg>
+    <p:spTree>
+      <p:nvGrpSpPr>
+        <p:cNvPr id="1" name=""/>
+        <p:cNvGrpSpPr/>
+        <p:nvPr/>
+      </p:nvGrpSpPr>
+      <p:grpSpPr/>
+      <p:sp>
+        <p:nvSpPr>
+          <p:cNvPr id="2" name="TextBox 1"/>
+          <p:cNvSpPr txBox="1"/>
+          <p:nvPr/>
+        </p:nvSpPr>
+        <p:spPr>
+          <a:xfrm>
+            <a:off x="640080" y="2052828"/>
+            <a:ext cx="10911535" cy="731520"/>
+          </a:xfrm>
+          <a:prstGeom prst="rect">
+            <a:avLst/>
+          </a:prstGeom>
+          <a:noFill/>
+        </p:spPr>
+        <p:txBody>
+          <a:bodyPr wrap="square">
+            <a:spAutoFit/>
+          </a:bodyPr>
+          <a:lstStyle/>
+          <a:p>
+            <a:pPr algn="ctr"/>
+            <a:r>
+              <a:rPr sz="4800" b="1" i="0">
+                <a:solidFill>
+                  <a:srgbClr val="FFFFFF"/>
+                </a:solidFill>
+                <a:latin typeface="Arial"/>
+              </a:rPr>
+              <a:t/>
+            </a:r>
+          </a:p>
+        </p:txBody>
+      </p:sp>
+      <p:sp>
+        <p:nvSpPr>
+          <p:cNvPr id="3" name="TextBox 2"/>
+          <p:cNvSpPr txBox="1"/>
+          <p:nvPr/>
+        </p:nvSpPr>
+        <p:spPr>
+          <a:xfrm>
+            <a:off x="640080" y="2985516"/>
+            <a:ext cx="10911535" cy="731520"/>
+          </a:xfrm>
+          <a:prstGeom prst="rect">
+            <a:avLst/>
+          </a:prstGeom>
+          <a:noFill/>
+        </p:spPr>
+        <p:txBody>
+          <a:bodyPr wrap="square">
+            <a:spAutoFit/>
+          </a:bodyPr>
+          <a:lstStyle/>
+          <a:p>
+            <a:pPr algn="ctr"/>
+            <a:r>
+              <a:rPr sz="4800" b="1" i="0">
+                <a:solidFill>
+                  <a:srgbClr val="FFFFFF"/>
+                </a:solidFill>
+                <a:latin typeface="Arial"/>
+              </a:rPr>
+              <a:t/>
+            </a:r>
+          </a:p>
+        </p:txBody>
+      </p:sp>
+    </p:spTree>
+  </p:cSld>
+  <p:clrMapOvr>
+    <a:masterClrMapping/>
+  </p:clrMapOvr>
+</p:sld>
+</file>
+
+<file path=ppt/slides/slide25.xml><?xml version="1.0" encoding="utf-8"?>
+<p:sld xmlns:a="http://schemas.openxmlformats.org/drawingml/2006/main" xmlns:p="http://schemas.openxmlformats.org/presentationml/2006/main" xmlns:r="http://schemas.openxmlformats.org/officeDocument/2006/relationships">
+  <p:cSld>
+    <p:bg>
+      <p:bgPr>
+        <a:solidFill>
+          <a:srgbClr val="000000"/>
+        </a:solidFill>
+        <a:effectLst/>
+      </p:bgPr>
+    </p:bg>
+    <p:spTree>
+      <p:nvGrpSpPr>
+        <p:cNvPr id="1" name=""/>
+        <p:cNvGrpSpPr/>
+        <p:nvPr/>
+      </p:nvGrpSpPr>
+      <p:grpSpPr/>
+      <p:sp>
+        <p:nvSpPr>
+          <p:cNvPr id="2" name="TextBox 1"/>
+          <p:cNvSpPr txBox="1"/>
+          <p:nvPr/>
+        </p:nvSpPr>
+        <p:spPr>
+          <a:xfrm>
+            <a:off x="640080" y="2052828"/>
+            <a:ext cx="10911535" cy="731520"/>
+          </a:xfrm>
+          <a:prstGeom prst="rect">
+            <a:avLst/>
+          </a:prstGeom>
+          <a:noFill/>
+        </p:spPr>
+        <p:txBody>
+          <a:bodyPr wrap="square">
+            <a:spAutoFit/>
+          </a:bodyPr>
+          <a:lstStyle/>
+          <a:p>
+            <a:pPr algn="ctr"/>
+            <a:r>
+              <a:rPr sz="4800" b="1" i="0">
+                <a:solidFill>
+                  <a:srgbClr val="FFFFFF"/>
+                </a:solidFill>
+                <a:latin typeface="Arial"/>
+              </a:rPr>
+              <a:t/>
+            </a:r>
+          </a:p>
+        </p:txBody>
+      </p:sp>
+      <p:sp>
+        <p:nvSpPr>
+          <p:cNvPr id="3" name="TextBox 2"/>
+          <p:cNvSpPr txBox="1"/>
+          <p:nvPr/>
+        </p:nvSpPr>
+        <p:spPr>
+          <a:xfrm>
+            <a:off x="640080" y="2985516"/>
+            <a:ext cx="10911535" cy="731520"/>
+          </a:xfrm>
+          <a:prstGeom prst="rect">
+            <a:avLst/>
+          </a:prstGeom>
+          <a:noFill/>
+        </p:spPr>
+        <p:txBody>
+          <a:bodyPr wrap="square">
+            <a:spAutoFit/>
+          </a:bodyPr>
+          <a:lstStyle/>
+          <a:p>
+            <a:pPr algn="ctr"/>
+            <a:r>
+              <a:rPr sz="4800" b="1" i="0">
+                <a:solidFill>
+                  <a:srgbClr val="FFFFFF"/>
+                </a:solidFill>
+                <a:latin typeface="Arial"/>
+              </a:rPr>
+              <a:t/>
+            </a:r>
+          </a:p>
+        </p:txBody>
+      </p:sp>
+    </p:spTree>
+  </p:cSld>
+  <p:clrMapOvr>
+    <a:masterClrMapping/>
+  </p:clrMapOvr>
+</p:sld>
+</file>
+
+<file path=ppt/slides/slide26.xml><?xml version="1.0" encoding="utf-8"?>
+<p:sld xmlns:a="http://schemas.openxmlformats.org/drawingml/2006/main" xmlns:p="http://schemas.openxmlformats.org/presentationml/2006/main" xmlns:r="http://schemas.openxmlformats.org/officeDocument/2006/relationships">
+  <p:cSld>
+    <p:bg>
+      <p:bgPr>
+        <a:solidFill>
+          <a:srgbClr val="000000"/>
+        </a:solidFill>
+        <a:effectLst/>
+      </p:bgPr>
+    </p:bg>
+    <p:spTree>
+      <p:nvGrpSpPr>
+        <p:cNvPr id="1" name=""/>
+        <p:cNvGrpSpPr/>
+        <p:nvPr/>
+      </p:nvGrpSpPr>
+      <p:grpSpPr/>
+      <p:sp>
+        <p:nvSpPr>
+          <p:cNvPr id="2" name="TextBox 1"/>
+          <p:cNvSpPr txBox="1"/>
+          <p:nvPr/>
+        </p:nvSpPr>
+        <p:spPr>
+          <a:xfrm>
+            <a:off x="640080" y="2052828"/>
+            <a:ext cx="10911535" cy="731520"/>
+          </a:xfrm>
+          <a:prstGeom prst="rect">
+            <a:avLst/>
+          </a:prstGeom>
+          <a:noFill/>
+        </p:spPr>
+        <p:txBody>
+          <a:bodyPr wrap="square">
+            <a:spAutoFit/>
+          </a:bodyPr>
+          <a:lstStyle/>
+          <a:p>
+            <a:pPr algn="ctr"/>
+            <a:r>
+              <a:rPr sz="4800" b="1" i="0">
+                <a:solidFill>
+                  <a:srgbClr val="FFFFFF"/>
+                </a:solidFill>
+                <a:latin typeface="Arial"/>
+              </a:rPr>
+              <a:t/>
+            </a:r>
+          </a:p>
+        </p:txBody>
+      </p:sp>
+      <p:sp>
+        <p:nvSpPr>
+          <p:cNvPr id="3" name="TextBox 2"/>
+          <p:cNvSpPr txBox="1"/>
+          <p:nvPr/>
+        </p:nvSpPr>
+        <p:spPr>
+          <a:xfrm>
+            <a:off x="640080" y="2985516"/>
+            <a:ext cx="10911535" cy="731520"/>
+          </a:xfrm>
+          <a:prstGeom prst="rect">
+            <a:avLst/>
+          </a:prstGeom>
+          <a:noFill/>
+        </p:spPr>
+        <p:txBody>
+          <a:bodyPr wrap="square">
+            <a:spAutoFit/>
+          </a:bodyPr>
+          <a:lstStyle/>
+          <a:p>
+            <a:pPr algn="ctr"/>
+            <a:r>
+              <a:rPr sz="4800" b="1" i="0">
+                <a:solidFill>
+                  <a:srgbClr val="FFFFFF"/>
+                </a:solidFill>
+                <a:latin typeface="Arial"/>
+              </a:rPr>
+              <a:t/>
+            </a:r>
+          </a:p>
+        </p:txBody>
+      </p:sp>
+    </p:spTree>
+  </p:cSld>
+  <p:clrMapOvr>
+    <a:masterClrMapping/>
+  </p:clrMapOvr>
+</p:sld>
+</file>
+
+<file path=ppt/slides/slide27.xml><?xml version="1.0" encoding="utf-8"?>
+<p:sld xmlns:a="http://schemas.openxmlformats.org/drawingml/2006/main" xmlns:p="http://schemas.openxmlformats.org/presentationml/2006/main" xmlns:r="http://schemas.openxmlformats.org/officeDocument/2006/relationships">
+  <p:cSld>
+    <p:bg>
+      <p:bgPr>
+        <a:solidFill>
+          <a:srgbClr val="000000"/>
+        </a:solidFill>
+        <a:effectLst/>
+      </p:bgPr>
+    </p:bg>
+    <p:spTree>
+      <p:nvGrpSpPr>
+        <p:cNvPr id="1" name=""/>
+        <p:cNvGrpSpPr/>
+        <p:nvPr/>
+      </p:nvGrpSpPr>
+      <p:grpSpPr/>
+      <p:sp>
+        <p:nvSpPr>
+          <p:cNvPr id="2" name="TextBox 1"/>
+          <p:cNvSpPr txBox="1"/>
+          <p:nvPr/>
+        </p:nvSpPr>
+        <p:spPr>
+          <a:xfrm>
+            <a:off x="640080" y="2052828"/>
+            <a:ext cx="10911535" cy="731520"/>
+          </a:xfrm>
+          <a:prstGeom prst="rect">
+            <a:avLst/>
+          </a:prstGeom>
+          <a:noFill/>
+        </p:spPr>
+        <p:txBody>
+          <a:bodyPr wrap="square">
+            <a:spAutoFit/>
+          </a:bodyPr>
+          <a:lstStyle/>
+          <a:p>
+            <a:pPr algn="ctr"/>
+            <a:r>
+              <a:rPr sz="4800" b="1" i="0">
+                <a:solidFill>
+                  <a:srgbClr val="FFFFFF"/>
+                </a:solidFill>
+                <a:latin typeface="Arial"/>
+              </a:rPr>
+              <a:t/>
+            </a:r>
+          </a:p>
+        </p:txBody>
+      </p:sp>
+      <p:sp>
+        <p:nvSpPr>
+          <p:cNvPr id="3" name="TextBox 2"/>
+          <p:cNvSpPr txBox="1"/>
+          <p:nvPr/>
+        </p:nvSpPr>
+        <p:spPr>
+          <a:xfrm>
+            <a:off x="640080" y="2985516"/>
+            <a:ext cx="10911535" cy="731520"/>
+          </a:xfrm>
+          <a:prstGeom prst="rect">
+            <a:avLst/>
+          </a:prstGeom>
+          <a:noFill/>
+        </p:spPr>
+        <p:txBody>
+          <a:bodyPr wrap="square">
+            <a:spAutoFit/>
+          </a:bodyPr>
+          <a:lstStyle/>
+          <a:p>
+            <a:pPr algn="ctr"/>
+            <a:r>
+              <a:rPr sz="4800" b="1" i="0">
+                <a:solidFill>
+                  <a:srgbClr val="FFFFFF"/>
                 </a:solidFill>
                 <a:latin typeface="Arial"/>
               </a:rPr>
@@ -4613,8 +5050,8 @@
         </p:nvSpPr>
         <p:spPr>
           <a:xfrm>
-            <a:off x="594360" y="2258568"/>
-            <a:ext cx="11002975" cy="685800"/>
+            <a:off x="640080" y="2500884"/>
+            <a:ext cx="10911535" cy="731520"/>
           </a:xfrm>
           <a:prstGeom prst="rect">
             <a:avLst/>
@@ -4629,13 +5066,13 @@
           <a:p>
             <a:pPr algn="ctr"/>
             <a:r>
-              <a:rPr sz="4400" b="1" i="0">
+              <a:rPr sz="4800" b="1" i="0">
                 <a:solidFill>
                   <a:srgbClr val="FFFFFF"/>
                 </a:solidFill>
                 <a:latin typeface="Arial"/>
               </a:rPr>
-              <a:t>Coroai-O com muitas coroas</a:t>
+              <a:t>妙なる歌声　天に満ちて。</a:t>
             </a:r>
           </a:p>
         </p:txBody>
@@ -4648,8 +5085,8 @@
         </p:nvSpPr>
         <p:spPr>
           <a:xfrm>
-            <a:off x="594360" y="2980944"/>
-            <a:ext cx="11002975" cy="347472"/>
+            <a:off x="640080" y="3268980"/>
+            <a:ext cx="10911535" cy="365760"/>
           </a:xfrm>
           <a:prstGeom prst="rect">
             <a:avLst/>
@@ -4664,13 +5101,13 @@
           <a:p>
             <a:pPr algn="ctr"/>
             <a:r>
-              <a:rPr sz="2200" b="0" i="1">
-                <a:solidFill>
-                  <a:srgbClr val="8C8C8C"/>
+              <a:rPr sz="2400" b="0" i="1">
+                <a:solidFill>
+                  <a:srgbClr val="AAAAAA"/>
                 </a:solidFill>
                 <a:latin typeface="Arial"/>
               </a:rPr>
-              <a:t/>
+              <a:t>myouna ru utagoe ten ni michi te .</a:t>
             </a:r>
           </a:p>
         </p:txBody>
@@ -4683,8 +5120,8 @@
         </p:nvSpPr>
         <p:spPr>
           <a:xfrm>
-            <a:off x="594360" y="3529584"/>
-            <a:ext cx="11002975" cy="685800"/>
+            <a:off x="640080" y="4046220"/>
+            <a:ext cx="10911535" cy="310896"/>
           </a:xfrm>
           <a:prstGeom prst="rect">
             <a:avLst/>
@@ -4699,48 +5136,13 @@
           <a:p>
             <a:pPr algn="ctr"/>
             <a:r>
-              <a:rPr sz="4400" b="1" i="0">
-                <a:solidFill>
-                  <a:srgbClr val="FFFFFF"/>
+              <a:rPr sz="2000" b="0" i="1">
+                <a:solidFill>
+                  <a:srgbClr val="828282"/>
                 </a:solidFill>
                 <a:latin typeface="Arial"/>
               </a:rPr>
-              <a:t>O Cordeiro em Seu trono</a:t>
-            </a:r>
-          </a:p>
-        </p:txBody>
-      </p:sp>
-      <p:sp>
-        <p:nvSpPr>
-          <p:cNvPr id="5" name="TextBox 4"/>
-          <p:cNvSpPr txBox="1"/>
-          <p:nvPr/>
-        </p:nvSpPr>
-        <p:spPr>
-          <a:xfrm>
-            <a:off x="594360" y="4251960"/>
-            <a:ext cx="11002975" cy="347472"/>
-          </a:xfrm>
-          <a:prstGeom prst="rect">
-            <a:avLst/>
-          </a:prstGeom>
-          <a:noFill/>
-        </p:spPr>
-        <p:txBody>
-          <a:bodyPr wrap="square">
-            <a:spAutoFit/>
-          </a:bodyPr>
-          <a:lstStyle/>
-          <a:p>
-            <a:pPr algn="ctr"/>
-            <a:r>
-              <a:rPr sz="2200" b="0" i="1">
-                <a:solidFill>
-                  <a:srgbClr val="8C8C8C"/>
-                </a:solidFill>
-                <a:latin typeface="Arial"/>
-              </a:rPr>
-              <a:t/>
+              <a:t>Coroai o Rei dos Reis</a:t>
             </a:r>
           </a:p>
         </p:txBody>
@@ -4779,8 +5181,8 @@
         </p:nvSpPr>
         <p:spPr>
           <a:xfrm>
-            <a:off x="594360" y="2258568"/>
-            <a:ext cx="11002975" cy="685800"/>
+            <a:off x="640080" y="2702052"/>
+            <a:ext cx="10911535" cy="731520"/>
           </a:xfrm>
           <a:prstGeom prst="rect">
             <a:avLst/>
@@ -4795,118 +5197,13 @@
           <a:p>
             <a:pPr algn="ctr"/>
             <a:r>
-              <a:rPr sz="4400" b="1" i="0">
+              <a:rPr sz="4800" b="1" i="0">
                 <a:solidFill>
                   <a:srgbClr val="FFFFFF"/>
                 </a:solidFill>
                 <a:latin typeface="Arial"/>
               </a:rPr>
-              <a:t>Desperta, minha alma, e canta</a:t>
-            </a:r>
-          </a:p>
-        </p:txBody>
-      </p:sp>
-      <p:sp>
-        <p:nvSpPr>
-          <p:cNvPr id="3" name="TextBox 2"/>
-          <p:cNvSpPr txBox="1"/>
-          <p:nvPr/>
-        </p:nvSpPr>
-        <p:spPr>
-          <a:xfrm>
-            <a:off x="594360" y="2980944"/>
-            <a:ext cx="11002975" cy="347472"/>
-          </a:xfrm>
-          <a:prstGeom prst="rect">
-            <a:avLst/>
-          </a:prstGeom>
-          <a:noFill/>
-        </p:spPr>
-        <p:txBody>
-          <a:bodyPr wrap="square">
-            <a:spAutoFit/>
-          </a:bodyPr>
-          <a:lstStyle/>
-          <a:p>
-            <a:pPr algn="ctr"/>
-            <a:r>
-              <a:rPr sz="2200" b="0" i="1">
-                <a:solidFill>
-                  <a:srgbClr val="8C8C8C"/>
-                </a:solidFill>
-                <a:latin typeface="Arial"/>
-              </a:rPr>
-              <a:t/>
-            </a:r>
-          </a:p>
-        </p:txBody>
-      </p:sp>
-      <p:sp>
-        <p:nvSpPr>
-          <p:cNvPr id="4" name="TextBox 3"/>
-          <p:cNvSpPr txBox="1"/>
-          <p:nvPr/>
-        </p:nvSpPr>
-        <p:spPr>
-          <a:xfrm>
-            <a:off x="594360" y="3529584"/>
-            <a:ext cx="11002975" cy="685800"/>
-          </a:xfrm>
-          <a:prstGeom prst="rect">
-            <a:avLst/>
-          </a:prstGeom>
-          <a:noFill/>
-        </p:spPr>
-        <p:txBody>
-          <a:bodyPr wrap="square">
-            <a:spAutoFit/>
-          </a:bodyPr>
-          <a:lstStyle/>
-          <a:p>
-            <a:pPr algn="ctr"/>
-            <a:r>
-              <a:rPr sz="4400" b="1" i="0">
-                <a:solidFill>
-                  <a:srgbClr val="FFFFFF"/>
-                </a:solidFill>
-                <a:latin typeface="Arial"/>
-              </a:rPr>
-              <a:t>Dos favores que Ele deu</a:t>
-            </a:r>
-          </a:p>
-        </p:txBody>
-      </p:sp>
-      <p:sp>
-        <p:nvSpPr>
-          <p:cNvPr id="5" name="TextBox 4"/>
-          <p:cNvSpPr txBox="1"/>
-          <p:nvPr/>
-        </p:nvSpPr>
-        <p:spPr>
-          <a:xfrm>
-            <a:off x="594360" y="4251960"/>
-            <a:ext cx="11002975" cy="347472"/>
-          </a:xfrm>
-          <a:prstGeom prst="rect">
-            <a:avLst/>
-          </a:prstGeom>
-          <a:noFill/>
-        </p:spPr>
-        <p:txBody>
-          <a:bodyPr wrap="square">
-            <a:spAutoFit/>
-          </a:bodyPr>
-          <a:lstStyle/>
-          <a:p>
-            <a:pPr algn="ctr"/>
-            <a:r>
-              <a:rPr sz="2200" b="0" i="1">
-                <a:solidFill>
-                  <a:srgbClr val="8C8C8C"/>
-                </a:solidFill>
-                <a:latin typeface="Arial"/>
-              </a:rPr>
-              <a:t/>
+              <a:t>O Cordeiro em Seu trono</a:t>
             </a:r>
           </a:p>
         </p:txBody>
@@ -4945,8 +5242,8 @@
         </p:nvSpPr>
         <p:spPr>
           <a:xfrm>
-            <a:off x="594360" y="2258568"/>
-            <a:ext cx="11002975" cy="685800"/>
+            <a:off x="640080" y="2500884"/>
+            <a:ext cx="10911535" cy="731520"/>
           </a:xfrm>
           <a:prstGeom prst="rect">
             <a:avLst/>
@@ -4961,13 +5258,13 @@
           <a:p>
             <a:pPr algn="ctr"/>
             <a:r>
-              <a:rPr sz="4400" b="1" i="0">
+              <a:rPr sz="4800" b="1" i="0">
                 <a:solidFill>
                   <a:srgbClr val="FFFFFF"/>
                 </a:solidFill>
                 <a:latin typeface="Arial"/>
               </a:rPr>
-              <a:t>Ricos ferimentos ainda visíveis</a:t>
+              <a:t>神の民よ、恵みの主に</a:t>
             </a:r>
           </a:p>
         </p:txBody>
@@ -4980,8 +5277,8 @@
         </p:nvSpPr>
         <p:spPr>
           <a:xfrm>
-            <a:off x="594360" y="2980944"/>
-            <a:ext cx="11002975" cy="347472"/>
+            <a:off x="640080" y="3268980"/>
+            <a:ext cx="10911535" cy="365760"/>
           </a:xfrm>
           <a:prstGeom prst="rect">
             <a:avLst/>
@@ -4996,13 +5293,13 @@
           <a:p>
             <a:pPr algn="ctr"/>
             <a:r>
-              <a:rPr sz="2200" b="0" i="1">
-                <a:solidFill>
-                  <a:srgbClr val="8C8C8C"/>
+              <a:rPr sz="2400" b="0" i="1">
+                <a:solidFill>
+                  <a:srgbClr val="AAAAAA"/>
                 </a:solidFill>
                 <a:latin typeface="Arial"/>
               </a:rPr>
-              <a:t/>
+              <a:t>kami no tami yo , megumi no omoni</a:t>
             </a:r>
           </a:p>
         </p:txBody>
@@ -5015,8 +5312,8 @@
         </p:nvSpPr>
         <p:spPr>
           <a:xfrm>
-            <a:off x="594360" y="3529584"/>
-            <a:ext cx="11002975" cy="685800"/>
+            <a:off x="640080" y="4046220"/>
+            <a:ext cx="10911535" cy="310896"/>
           </a:xfrm>
           <a:prstGeom prst="rect">
             <a:avLst/>
@@ -5031,48 +5328,13 @@
           <a:p>
             <a:pPr algn="ctr"/>
             <a:r>
-              <a:rPr sz="4400" b="1" i="0">
-                <a:solidFill>
-                  <a:srgbClr val="FFFFFF"/>
+              <a:rPr sz="2000" b="0" i="1">
+                <a:solidFill>
+                  <a:srgbClr val="828282"/>
                 </a:solidFill>
                 <a:latin typeface="Arial"/>
               </a:rPr>
-              <a:t>Em beleza glorificada</a:t>
-            </a:r>
-          </a:p>
-        </p:txBody>
-      </p:sp>
-      <p:sp>
-        <p:nvSpPr>
-          <p:cNvPr id="5" name="TextBox 4"/>
-          <p:cNvSpPr txBox="1"/>
-          <p:nvPr/>
-        </p:nvSpPr>
-        <p:spPr>
-          <a:xfrm>
-            <a:off x="594360" y="4251960"/>
-            <a:ext cx="11002975" cy="347472"/>
-          </a:xfrm>
-          <a:prstGeom prst="rect">
-            <a:avLst/>
-          </a:prstGeom>
-          <a:noFill/>
-        </p:spPr>
-        <p:txBody>
-          <a:bodyPr wrap="square">
-            <a:spAutoFit/>
-          </a:bodyPr>
-          <a:lstStyle/>
-          <a:p>
-            <a:pPr algn="ctr"/>
-            <a:r>
-              <a:rPr sz="2200" b="0" i="1">
-                <a:solidFill>
-                  <a:srgbClr val="8C8C8C"/>
-                </a:solidFill>
-                <a:latin typeface="Arial"/>
-              </a:rPr>
-              <a:t/>
+              <a:t>Coroai o Rei dos Reis</a:t>
             </a:r>
           </a:p>
         </p:txBody>
@@ -5111,8 +5373,8 @@
         </p:nvSpPr>
         <p:spPr>
           <a:xfrm>
-            <a:off x="594360" y="2258568"/>
-            <a:ext cx="11002975" cy="685800"/>
+            <a:off x="640080" y="2702052"/>
+            <a:ext cx="10911535" cy="731520"/>
           </a:xfrm>
           <a:prstGeom prst="rect">
             <a:avLst/>
@@ -5127,118 +5389,13 @@
           <a:p>
             <a:pPr algn="ctr"/>
             <a:r>
-              <a:rPr sz="4400" b="1" i="0">
+              <a:rPr sz="4800" b="1" i="0">
                 <a:solidFill>
                   <a:srgbClr val="FFFFFF"/>
                 </a:solidFill>
                 <a:latin typeface="Arial"/>
               </a:rPr>
-              <a:t>Coroai-O com muitas coroas</a:t>
-            </a:r>
-          </a:p>
-        </p:txBody>
-      </p:sp>
-      <p:sp>
-        <p:nvSpPr>
-          <p:cNvPr id="3" name="TextBox 2"/>
-          <p:cNvSpPr txBox="1"/>
-          <p:nvPr/>
-        </p:nvSpPr>
-        <p:spPr>
-          <a:xfrm>
-            <a:off x="594360" y="2980944"/>
-            <a:ext cx="11002975" cy="347472"/>
-          </a:xfrm>
-          <a:prstGeom prst="rect">
-            <a:avLst/>
-          </a:prstGeom>
-          <a:noFill/>
-        </p:spPr>
-        <p:txBody>
-          <a:bodyPr wrap="square">
-            <a:spAutoFit/>
-          </a:bodyPr>
-          <a:lstStyle/>
-          <a:p>
-            <a:pPr algn="ctr"/>
-            <a:r>
-              <a:rPr sz="2200" b="0" i="1">
-                <a:solidFill>
-                  <a:srgbClr val="8C8C8C"/>
-                </a:solidFill>
-                <a:latin typeface="Arial"/>
-              </a:rPr>
-              <a:t/>
-            </a:r>
-          </a:p>
-        </p:txBody>
-      </p:sp>
-      <p:sp>
-        <p:nvSpPr>
-          <p:cNvPr id="4" name="TextBox 3"/>
-          <p:cNvSpPr txBox="1"/>
-          <p:nvPr/>
-        </p:nvSpPr>
-        <p:spPr>
-          <a:xfrm>
-            <a:off x="594360" y="3529584"/>
-            <a:ext cx="11002975" cy="685800"/>
-          </a:xfrm>
-          <a:prstGeom prst="rect">
-            <a:avLst/>
-          </a:prstGeom>
-          <a:noFill/>
-        </p:spPr>
-        <p:txBody>
-          <a:bodyPr wrap="square">
-            <a:spAutoFit/>
-          </a:bodyPr>
-          <a:lstStyle/>
-          <a:p>
-            <a:pPr algn="ctr"/>
-            <a:r>
-              <a:rPr sz="4400" b="1" i="0">
-                <a:solidFill>
-                  <a:srgbClr val="FFFFFF"/>
-                </a:solidFill>
-                <a:latin typeface="Arial"/>
-              </a:rPr>
-              <a:t>O Cordeiro em Seu trono</a:t>
-            </a:r>
-          </a:p>
-        </p:txBody>
-      </p:sp>
-      <p:sp>
-        <p:nvSpPr>
-          <p:cNvPr id="5" name="TextBox 4"/>
-          <p:cNvSpPr txBox="1"/>
-          <p:nvPr/>
-        </p:nvSpPr>
-        <p:spPr>
-          <a:xfrm>
-            <a:off x="594360" y="4251960"/>
-            <a:ext cx="11002975" cy="347472"/>
-          </a:xfrm>
-          <a:prstGeom prst="rect">
-            <a:avLst/>
-          </a:prstGeom>
-          <a:noFill/>
-        </p:spPr>
-        <p:txBody>
-          <a:bodyPr wrap="square">
-            <a:spAutoFit/>
-          </a:bodyPr>
-          <a:lstStyle/>
-          <a:p>
-            <a:pPr algn="ctr"/>
-            <a:r>
-              <a:rPr sz="2200" b="0" i="1">
-                <a:solidFill>
-                  <a:srgbClr val="8C8C8C"/>
-                </a:solidFill>
-                <a:latin typeface="Arial"/>
-              </a:rPr>
-              <a:t/>
+              <a:t>Enquanto a música celestial</a:t>
             </a:r>
           </a:p>
         </p:txBody>
@@ -5277,8 +5434,8 @@
         </p:nvSpPr>
         <p:spPr>
           <a:xfrm>
-            <a:off x="594360" y="2258568"/>
-            <a:ext cx="11002975" cy="685800"/>
+            <a:off x="640080" y="2500884"/>
+            <a:ext cx="10911535" cy="731520"/>
           </a:xfrm>
           <a:prstGeom prst="rect">
             <a:avLst/>
@@ -5293,13 +5450,13 @@
           <a:p>
             <a:pPr algn="ctr"/>
             <a:r>
-              <a:rPr sz="4400" b="1" i="0">
+              <a:rPr sz="4800" b="1" i="0">
                 <a:solidFill>
                   <a:srgbClr val="FFFFFF"/>
                 </a:solidFill>
                 <a:latin typeface="Arial"/>
               </a:rPr>
-              <a:t>Desperta, minha alma, e canta</a:t>
+              <a:t>栄えのかむりを　ささげ歌わん。</a:t>
             </a:r>
           </a:p>
         </p:txBody>
@@ -5312,8 +5469,8 @@
         </p:nvSpPr>
         <p:spPr>
           <a:xfrm>
-            <a:off x="594360" y="2980944"/>
-            <a:ext cx="11002975" cy="347472"/>
+            <a:off x="640080" y="3268980"/>
+            <a:ext cx="10911535" cy="365760"/>
           </a:xfrm>
           <a:prstGeom prst="rect">
             <a:avLst/>
@@ -5328,13 +5485,13 @@
           <a:p>
             <a:pPr algn="ctr"/>
             <a:r>
-              <a:rPr sz="2200" b="0" i="1">
-                <a:solidFill>
-                  <a:srgbClr val="8C8C8C"/>
+              <a:rPr sz="2400" b="0" i="1">
+                <a:solidFill>
+                  <a:srgbClr val="AAAAAA"/>
                 </a:solidFill>
                 <a:latin typeface="Arial"/>
               </a:rPr>
-              <a:t/>
+              <a:t>sakae nokamuriwo sasage utawa n .</a:t>
             </a:r>
           </a:p>
         </p:txBody>
@@ -5347,8 +5504,8 @@
         </p:nvSpPr>
         <p:spPr>
           <a:xfrm>
-            <a:off x="594360" y="3529584"/>
-            <a:ext cx="11002975" cy="685800"/>
+            <a:off x="640080" y="4046220"/>
+            <a:ext cx="10911535" cy="310896"/>
           </a:xfrm>
           <a:prstGeom prst="rect">
             <a:avLst/>
@@ -5363,48 +5520,13 @@
           <a:p>
             <a:pPr algn="ctr"/>
             <a:r>
-              <a:rPr sz="4400" b="1" i="0">
-                <a:solidFill>
-                  <a:srgbClr val="FFFFFF"/>
+              <a:rPr sz="2000" b="0" i="1">
+                <a:solidFill>
+                  <a:srgbClr val="828282"/>
                 </a:solidFill>
                 <a:latin typeface="Arial"/>
               </a:rPr>
-              <a:t>Dos favores que Ele deu</a:t>
-            </a:r>
-          </a:p>
-        </p:txBody>
-      </p:sp>
-      <p:sp>
-        <p:nvSpPr>
-          <p:cNvPr id="5" name="TextBox 4"/>
-          <p:cNvSpPr txBox="1"/>
-          <p:nvPr/>
-        </p:nvSpPr>
-        <p:spPr>
-          <a:xfrm>
-            <a:off x="594360" y="4251960"/>
-            <a:ext cx="11002975" cy="347472"/>
-          </a:xfrm>
-          <a:prstGeom prst="rect">
-            <a:avLst/>
-          </a:prstGeom>
-          <a:noFill/>
-        </p:spPr>
-        <p:txBody>
-          <a:bodyPr wrap="square">
-            <a:spAutoFit/>
-          </a:bodyPr>
-          <a:lstStyle/>
-          <a:p>
-            <a:pPr algn="ctr"/>
-            <a:r>
-              <a:rPr sz="2200" b="0" i="1">
-                <a:solidFill>
-                  <a:srgbClr val="8C8C8C"/>
-                </a:solidFill>
-                <a:latin typeface="Arial"/>
-              </a:rPr>
-              <a:t/>
+              <a:t>Coroai o Rei dos Reis</a:t>
             </a:r>
           </a:p>
         </p:txBody>
@@ -5443,8 +5565,8 @@
         </p:nvSpPr>
         <p:spPr>
           <a:xfrm>
-            <a:off x="594360" y="2258568"/>
-            <a:ext cx="11002975" cy="685800"/>
+            <a:off x="640080" y="2052828"/>
+            <a:ext cx="10911535" cy="731520"/>
           </a:xfrm>
           <a:prstGeom prst="rect">
             <a:avLst/>
@@ -5459,13 +5581,13 @@
           <a:p>
             <a:pPr algn="ctr"/>
             <a:r>
-              <a:rPr sz="4400" b="1" i="0">
+              <a:rPr sz="4800" b="1" i="0">
                 <a:solidFill>
                   <a:srgbClr val="FFFFFF"/>
                 </a:solidFill>
                 <a:latin typeface="Arial"/>
               </a:rPr>
-              <a:t>Coroai-O Senhor da vida</a:t>
+              <a:t>Ressoa ao redor do nome</a:t>
             </a:r>
           </a:p>
         </p:txBody>
@@ -5478,8 +5600,8 @@
         </p:nvSpPr>
         <p:spPr>
           <a:xfrm>
-            <a:off x="594360" y="2980944"/>
-            <a:ext cx="11002975" cy="347472"/>
+            <a:off x="640080" y="2985516"/>
+            <a:ext cx="10911535" cy="731520"/>
           </a:xfrm>
           <a:prstGeom prst="rect">
             <a:avLst/>
@@ -5494,83 +5616,13 @@
           <a:p>
             <a:pPr algn="ctr"/>
             <a:r>
-              <a:rPr sz="2200" b="0" i="1">
-                <a:solidFill>
-                  <a:srgbClr val="8C8C8C"/>
+              <a:rPr sz="4800" b="1" i="0">
+                <a:solidFill>
+                  <a:srgbClr val="FFFFFF"/>
                 </a:solidFill>
                 <a:latin typeface="Arial"/>
               </a:rPr>
-              <a:t/>
-            </a:r>
-          </a:p>
-        </p:txBody>
-      </p:sp>
-      <p:sp>
-        <p:nvSpPr>
-          <p:cNvPr id="4" name="TextBox 3"/>
-          <p:cNvSpPr txBox="1"/>
-          <p:nvPr/>
-        </p:nvSpPr>
-        <p:spPr>
-          <a:xfrm>
-            <a:off x="594360" y="3529584"/>
-            <a:ext cx="11002975" cy="685800"/>
-          </a:xfrm>
-          <a:prstGeom prst="rect">
-            <a:avLst/>
-          </a:prstGeom>
-          <a:noFill/>
-        </p:spPr>
-        <p:txBody>
-          <a:bodyPr wrap="square">
-            <a:spAutoFit/>
-          </a:bodyPr>
-          <a:lstStyle/>
-          <a:p>
-            <a:pPr algn="ctr"/>
-            <a:r>
-              <a:rPr sz="4400" b="1" i="0">
-                <a:solidFill>
-                  <a:srgbClr val="FFFFFF"/>
-                </a:solidFill>
-                <a:latin typeface="Arial"/>
-              </a:rPr>
-              <a:t>Que triunfou sobre a cova</a:t>
-            </a:r>
-          </a:p>
-        </p:txBody>
-      </p:sp>
-      <p:sp>
-        <p:nvSpPr>
-          <p:cNvPr id="5" name="TextBox 4"/>
-          <p:cNvSpPr txBox="1"/>
-          <p:nvPr/>
-        </p:nvSpPr>
-        <p:spPr>
-          <a:xfrm>
-            <a:off x="594360" y="4251960"/>
-            <a:ext cx="11002975" cy="347472"/>
-          </a:xfrm>
-          <a:prstGeom prst="rect">
-            <a:avLst/>
-          </a:prstGeom>
-          <a:noFill/>
-        </p:spPr>
-        <p:txBody>
-          <a:bodyPr wrap="square">
-            <a:spAutoFit/>
-          </a:bodyPr>
-          <a:lstStyle/>
-          <a:p>
-            <a:pPr algn="ctr"/>
-            <a:r>
-              <a:rPr sz="2200" b="0" i="1">
-                <a:solidFill>
-                  <a:srgbClr val="8C8C8C"/>
-                </a:solidFill>
-                <a:latin typeface="Arial"/>
-              </a:rPr>
-              <a:t/>
+              <a:t>Coroai-O com muitas coroas</a:t>
             </a:r>
           </a:p>
         </p:txBody>
@@ -5609,8 +5661,8 @@
         </p:nvSpPr>
         <p:spPr>
           <a:xfrm>
-            <a:off x="594360" y="2258568"/>
-            <a:ext cx="11002975" cy="685800"/>
+            <a:off x="640080" y="2052828"/>
+            <a:ext cx="10911535" cy="731520"/>
           </a:xfrm>
           <a:prstGeom prst="rect">
             <a:avLst/>
@@ -5625,13 +5677,13 @@
           <a:p>
             <a:pPr algn="ctr"/>
             <a:r>
-              <a:rPr sz="4400" b="1" i="0">
+              <a:rPr sz="4800" b="1" i="0">
                 <a:solidFill>
                   <a:srgbClr val="FFFFFF"/>
                 </a:solidFill>
                 <a:latin typeface="Arial"/>
               </a:rPr>
-              <a:t>Desperta, minha alma, e canta</a:t>
+              <a:t>O Cordeiro em Seu trono</a:t>
             </a:r>
           </a:p>
         </p:txBody>
@@ -5644,8 +5696,8 @@
         </p:nvSpPr>
         <p:spPr>
           <a:xfrm>
-            <a:off x="594360" y="2980944"/>
-            <a:ext cx="11002975" cy="347472"/>
+            <a:off x="640080" y="2985516"/>
+            <a:ext cx="10911535" cy="731520"/>
           </a:xfrm>
           <a:prstGeom prst="rect">
             <a:avLst/>
@@ -5660,83 +5712,13 @@
           <a:p>
             <a:pPr algn="ctr"/>
             <a:r>
-              <a:rPr sz="2200" b="0" i="1">
-                <a:solidFill>
-                  <a:srgbClr val="8C8C8C"/>
+              <a:rPr sz="4800" b="1" i="0">
+                <a:solidFill>
+                  <a:srgbClr val="FFFFFF"/>
                 </a:solidFill>
                 <a:latin typeface="Arial"/>
               </a:rPr>
-              <a:t/>
-            </a:r>
-          </a:p>
-        </p:txBody>
-      </p:sp>
-      <p:sp>
-        <p:nvSpPr>
-          <p:cNvPr id="4" name="TextBox 3"/>
-          <p:cNvSpPr txBox="1"/>
-          <p:nvPr/>
-        </p:nvSpPr>
-        <p:spPr>
-          <a:xfrm>
-            <a:off x="594360" y="3529584"/>
-            <a:ext cx="11002975" cy="685800"/>
-          </a:xfrm>
-          <a:prstGeom prst="rect">
-            <a:avLst/>
-          </a:prstGeom>
-          <a:noFill/>
-        </p:spPr>
-        <p:txBody>
-          <a:bodyPr wrap="square">
-            <a:spAutoFit/>
-          </a:bodyPr>
-          <a:lstStyle/>
-          <a:p>
-            <a:pPr algn="ctr"/>
-            <a:r>
-              <a:rPr sz="4400" b="1" i="0">
-                <a:solidFill>
-                  <a:srgbClr val="FFFFFF"/>
-                </a:solidFill>
-                <a:latin typeface="Arial"/>
-              </a:rPr>
-              <a:t/>
-            </a:r>
-          </a:p>
-        </p:txBody>
-      </p:sp>
-      <p:sp>
-        <p:nvSpPr>
-          <p:cNvPr id="5" name="TextBox 4"/>
-          <p:cNvSpPr txBox="1"/>
-          <p:nvPr/>
-        </p:nvSpPr>
-        <p:spPr>
-          <a:xfrm>
-            <a:off x="594360" y="4251960"/>
-            <a:ext cx="11002975" cy="347472"/>
-          </a:xfrm>
-          <a:prstGeom prst="rect">
-            <a:avLst/>
-          </a:prstGeom>
-          <a:noFill/>
-        </p:spPr>
-        <p:txBody>
-          <a:bodyPr wrap="square">
-            <a:spAutoFit/>
-          </a:bodyPr>
-          <a:lstStyle/>
-          <a:p>
-            <a:pPr algn="ctr"/>
-            <a:r>
-              <a:rPr sz="2200" b="0" i="1">
-                <a:solidFill>
-                  <a:srgbClr val="8C8C8C"/>
-                </a:solidFill>
-                <a:latin typeface="Arial"/>
-              </a:rPr>
-              <a:t/>
+              <a:t>Desperta, minha alma, e canta</a:t>
             </a:r>
           </a:p>
         </p:txBody>

--- a/output_pptx/Crown_Him_With_Many_Crowns.pptx
+++ b/output_pptx/Crown_Him_With_Many_Crowns.pptx
@@ -3323,6 +3323,76 @@
           </a:p>
         </p:txBody>
       </p:sp>
+      <p:sp>
+        <p:nvSpPr>
+          <p:cNvPr id="4" name="TextBox 3"/>
+          <p:cNvSpPr txBox="1"/>
+          <p:nvPr/>
+        </p:nvSpPr>
+        <p:spPr>
+          <a:xfrm>
+            <a:off x="640080" y="4128516"/>
+            <a:ext cx="10911535" cy="310896"/>
+          </a:xfrm>
+          <a:prstGeom prst="rect">
+            <a:avLst/>
+          </a:prstGeom>
+          <a:noFill/>
+        </p:spPr>
+        <p:txBody>
+          <a:bodyPr wrap="square">
+            <a:spAutoFit/>
+          </a:bodyPr>
+          <a:lstStyle/>
+          <a:p>
+            <a:pPr algn="ctr"/>
+            <a:r>
+              <a:rPr sz="2000" b="0" i="0">
+                <a:solidFill>
+                  <a:srgbClr val="828282"/>
+                </a:solidFill>
+                <a:latin typeface="Arial"/>
+              </a:rPr>
+              <a:t>主が与えられた恵みから</a:t>
+            </a:r>
+          </a:p>
+        </p:txBody>
+      </p:sp>
+      <p:sp>
+        <p:nvSpPr>
+          <p:cNvPr id="5" name="TextBox 4"/>
+          <p:cNvSpPr txBox="1"/>
+          <p:nvPr/>
+        </p:nvSpPr>
+        <p:spPr>
+          <a:xfrm>
+            <a:off x="640080" y="4494276"/>
+            <a:ext cx="10911535" cy="310896"/>
+          </a:xfrm>
+          <a:prstGeom prst="rect">
+            <a:avLst/>
+          </a:prstGeom>
+          <a:noFill/>
+        </p:spPr>
+        <p:txBody>
+          <a:bodyPr wrap="square">
+            <a:spAutoFit/>
+          </a:bodyPr>
+          <a:lstStyle/>
+          <a:p>
+            <a:pPr algn="ctr"/>
+            <a:r>
+              <a:rPr sz="2000" b="0" i="0">
+                <a:solidFill>
+                  <a:srgbClr val="828282"/>
+                </a:solidFill>
+                <a:latin typeface="Arial"/>
+              </a:rPr>
+              <a:t>なお見える豊かな傷</a:t>
+            </a:r>
+          </a:p>
+        </p:txBody>
+      </p:sp>
     </p:spTree>
   </p:cSld>
   <p:clrMapOvr>
@@ -3419,6 +3489,76 @@
           </a:p>
         </p:txBody>
       </p:sp>
+      <p:sp>
+        <p:nvSpPr>
+          <p:cNvPr id="4" name="TextBox 3"/>
+          <p:cNvSpPr txBox="1"/>
+          <p:nvPr/>
+        </p:nvSpPr>
+        <p:spPr>
+          <a:xfrm>
+            <a:off x="640080" y="4128516"/>
+            <a:ext cx="10911535" cy="310896"/>
+          </a:xfrm>
+          <a:prstGeom prst="rect">
+            <a:avLst/>
+          </a:prstGeom>
+          <a:noFill/>
+        </p:spPr>
+        <p:txBody>
+          <a:bodyPr wrap="square">
+            <a:spAutoFit/>
+          </a:bodyPr>
+          <a:lstStyle/>
+          <a:p>
+            <a:pPr algn="ctr"/>
+            <a:r>
+              <a:rPr sz="2000" b="0" i="0">
+                <a:solidFill>
+                  <a:srgbClr val="828282"/>
+                </a:solidFill>
+                <a:latin typeface="Arial"/>
+              </a:rPr>
+              <a:t>栄光のうちに美しく</a:t>
+            </a:r>
+          </a:p>
+        </p:txBody>
+      </p:sp>
+      <p:sp>
+        <p:nvSpPr>
+          <p:cNvPr id="5" name="TextBox 4"/>
+          <p:cNvSpPr txBox="1"/>
+          <p:nvPr/>
+        </p:nvSpPr>
+        <p:spPr>
+          <a:xfrm>
+            <a:off x="640080" y="4494276"/>
+            <a:ext cx="10911535" cy="310896"/>
+          </a:xfrm>
+          <a:prstGeom prst="rect">
+            <a:avLst/>
+          </a:prstGeom>
+          <a:noFill/>
+        </p:spPr>
+        <p:txBody>
+          <a:bodyPr wrap="square">
+            <a:spAutoFit/>
+          </a:bodyPr>
+          <a:lstStyle/>
+          <a:p>
+            <a:pPr algn="ctr"/>
+            <a:r>
+              <a:rPr sz="2000" b="0" i="0">
+                <a:solidFill>
+                  <a:srgbClr val="828282"/>
+                </a:solidFill>
+                <a:latin typeface="Arial"/>
+              </a:rPr>
+              <a:t>多くの冠でお戴冠させよ</a:t>
+            </a:r>
+          </a:p>
+        </p:txBody>
+      </p:sp>
     </p:spTree>
   </p:cSld>
   <p:clrMapOvr>
@@ -3515,6 +3655,76 @@
           </a:p>
         </p:txBody>
       </p:sp>
+      <p:sp>
+        <p:nvSpPr>
+          <p:cNvPr id="4" name="TextBox 3"/>
+          <p:cNvSpPr txBox="1"/>
+          <p:nvPr/>
+        </p:nvSpPr>
+        <p:spPr>
+          <a:xfrm>
+            <a:off x="640080" y="4128516"/>
+            <a:ext cx="10911535" cy="310896"/>
+          </a:xfrm>
+          <a:prstGeom prst="rect">
+            <a:avLst/>
+          </a:prstGeom>
+          <a:noFill/>
+        </p:spPr>
+        <p:txBody>
+          <a:bodyPr wrap="square">
+            <a:spAutoFit/>
+          </a:bodyPr>
+          <a:lstStyle/>
+          <a:p>
+            <a:pPr algn="ctr"/>
+            <a:r>
+              <a:rPr sz="2000" b="0" i="0">
+                <a:solidFill>
+                  <a:srgbClr val="828282"/>
+                </a:solidFill>
+                <a:latin typeface="Arial"/>
+              </a:rPr>
+              <a:t>玉座の子羊</a:t>
+            </a:r>
+          </a:p>
+        </p:txBody>
+      </p:sp>
+      <p:sp>
+        <p:nvSpPr>
+          <p:cNvPr id="5" name="TextBox 4"/>
+          <p:cNvSpPr txBox="1"/>
+          <p:nvPr/>
+        </p:nvSpPr>
+        <p:spPr>
+          <a:xfrm>
+            <a:off x="640080" y="4494276"/>
+            <a:ext cx="10911535" cy="310896"/>
+          </a:xfrm>
+          <a:prstGeom prst="rect">
+            <a:avLst/>
+          </a:prstGeom>
+          <a:noFill/>
+        </p:spPr>
+        <p:txBody>
+          <a:bodyPr wrap="square">
+            <a:spAutoFit/>
+          </a:bodyPr>
+          <a:lstStyle/>
+          <a:p>
+            <a:pPr algn="ctr"/>
+            <a:r>
+              <a:rPr sz="2000" b="0" i="0">
+                <a:solidFill>
+                  <a:srgbClr val="828282"/>
+                </a:solidFill>
+                <a:latin typeface="Arial"/>
+              </a:rPr>
+              <a:t>わが魂よ、目覚めて歌え</a:t>
+            </a:r>
+          </a:p>
+        </p:txBody>
+      </p:sp>
     </p:spTree>
   </p:cSld>
   <p:clrMapOvr>
@@ -3576,6 +3786,41 @@
           </a:p>
         </p:txBody>
       </p:sp>
+      <p:sp>
+        <p:nvSpPr>
+          <p:cNvPr id="3" name="TextBox 2"/>
+          <p:cNvSpPr txBox="1"/>
+          <p:nvPr/>
+        </p:nvSpPr>
+        <p:spPr>
+          <a:xfrm>
+            <a:off x="640080" y="3845052"/>
+            <a:ext cx="10911535" cy="310896"/>
+          </a:xfrm>
+          <a:prstGeom prst="rect">
+            <a:avLst/>
+          </a:prstGeom>
+          <a:noFill/>
+        </p:spPr>
+        <p:txBody>
+          <a:bodyPr wrap="square">
+            <a:spAutoFit/>
+          </a:bodyPr>
+          <a:lstStyle/>
+          <a:p>
+            <a:pPr algn="ctr"/>
+            <a:r>
+              <a:rPr sz="2000" b="0" i="0">
+                <a:solidFill>
+                  <a:srgbClr val="828282"/>
+                </a:solidFill>
+                <a:latin typeface="Arial"/>
+              </a:rPr>
+              <a:t>主が与えられた恵みから</a:t>
+            </a:r>
+          </a:p>
+        </p:txBody>
+      </p:sp>
     </p:spTree>
   </p:cSld>
   <p:clrMapOvr>
@@ -3768,6 +4013,41 @@
           </a:p>
         </p:txBody>
       </p:sp>
+      <p:sp>
+        <p:nvSpPr>
+          <p:cNvPr id="3" name="TextBox 2"/>
+          <p:cNvSpPr txBox="1"/>
+          <p:nvPr/>
+        </p:nvSpPr>
+        <p:spPr>
+          <a:xfrm>
+            <a:off x="640080" y="3845052"/>
+            <a:ext cx="10911535" cy="310896"/>
+          </a:xfrm>
+          <a:prstGeom prst="rect">
+            <a:avLst/>
+          </a:prstGeom>
+          <a:noFill/>
+        </p:spPr>
+        <p:txBody>
+          <a:bodyPr wrap="square">
+            <a:spAutoFit/>
+          </a:bodyPr>
+          <a:lstStyle/>
+          <a:p>
+            <a:pPr algn="ctr"/>
+            <a:r>
+              <a:rPr sz="2000" b="0" i="0">
+                <a:solidFill>
+                  <a:srgbClr val="828282"/>
+                </a:solidFill>
+                <a:latin typeface="Arial"/>
+              </a:rPr>
+              <a:t>命の主を戴冠させよ</a:t>
+            </a:r>
+          </a:p>
+        </p:txBody>
+      </p:sp>
     </p:spTree>
   </p:cSld>
   <p:clrMapOvr>
@@ -3960,6 +4240,41 @@
           </a:p>
         </p:txBody>
       </p:sp>
+      <p:sp>
+        <p:nvSpPr>
+          <p:cNvPr id="3" name="TextBox 2"/>
+          <p:cNvSpPr txBox="1"/>
+          <p:nvPr/>
+        </p:nvSpPr>
+        <p:spPr>
+          <a:xfrm>
+            <a:off x="640080" y="3845052"/>
+            <a:ext cx="10911535" cy="310896"/>
+          </a:xfrm>
+          <a:prstGeom prst="rect">
+            <a:avLst/>
+          </a:prstGeom>
+          <a:noFill/>
+        </p:spPr>
+        <p:txBody>
+          <a:bodyPr wrap="square">
+            <a:spAutoFit/>
+          </a:bodyPr>
+          <a:lstStyle/>
+          <a:p>
+            <a:pPr algn="ctr"/>
+            <a:r>
+              <a:rPr sz="2000" b="0" i="0">
+                <a:solidFill>
+                  <a:srgbClr val="828282"/>
+                </a:solidFill>
+                <a:latin typeface="Arial"/>
+              </a:rPr>
+              <a:t>よみの穴に勝利された方</a:t>
+            </a:r>
+          </a:p>
+        </p:txBody>
+      </p:sp>
     </p:spTree>
   </p:cSld>
   <p:clrMapOvr>
@@ -4152,6 +4467,41 @@
           </a:p>
         </p:txBody>
       </p:sp>
+      <p:sp>
+        <p:nvSpPr>
+          <p:cNvPr id="3" name="TextBox 2"/>
+          <p:cNvSpPr txBox="1"/>
+          <p:nvPr/>
+        </p:nvSpPr>
+        <p:spPr>
+          <a:xfrm>
+            <a:off x="640080" y="3845052"/>
+            <a:ext cx="10911535" cy="310896"/>
+          </a:xfrm>
+          <a:prstGeom prst="rect">
+            <a:avLst/>
+          </a:prstGeom>
+          <a:noFill/>
+        </p:spPr>
+        <p:txBody>
+          <a:bodyPr wrap="square">
+            <a:spAutoFit/>
+          </a:bodyPr>
+          <a:lstStyle/>
+          <a:p>
+            <a:pPr algn="ctr"/>
+            <a:r>
+              <a:rPr sz="2000" b="0" i="0">
+                <a:solidFill>
+                  <a:srgbClr val="828282"/>
+                </a:solidFill>
+                <a:latin typeface="Arial"/>
+              </a:rPr>
+              <a:t>わが魂よ、目覚めて歌え</a:t>
+            </a:r>
+          </a:p>
+        </p:txBody>
+      </p:sp>
     </p:spTree>
   </p:cSld>
   <p:clrMapOvr>
@@ -4213,6 +4563,41 @@
           </a:p>
         </p:txBody>
       </p:sp>
+      <p:sp>
+        <p:nvSpPr>
+          <p:cNvPr id="3" name="TextBox 2"/>
+          <p:cNvSpPr txBox="1"/>
+          <p:nvPr/>
+        </p:nvSpPr>
+        <p:spPr>
+          <a:xfrm>
+            <a:off x="640080" y="3845052"/>
+            <a:ext cx="10911535" cy="310896"/>
+          </a:xfrm>
+          <a:prstGeom prst="rect">
+            <a:avLst/>
+          </a:prstGeom>
+          <a:noFill/>
+        </p:spPr>
+        <p:txBody>
+          <a:bodyPr wrap="square">
+            <a:spAutoFit/>
+          </a:bodyPr>
+          <a:lstStyle/>
+          <a:p>
+            <a:pPr algn="ctr"/>
+            <a:r>
+              <a:rPr sz="2000" b="0" i="0">
+                <a:solidFill>
+                  <a:srgbClr val="828282"/>
+                </a:solidFill>
+                <a:latin typeface="Arial"/>
+              </a:rPr>
+              <a:t>諸王の王を戴冠させよ</a:t>
+            </a:r>
+          </a:p>
+        </p:txBody>
+      </p:sp>
     </p:spTree>
   </p:cSld>
   <p:clrMapOvr>
@@ -5208,6 +5593,41 @@
           </a:p>
         </p:txBody>
       </p:sp>
+      <p:sp>
+        <p:nvSpPr>
+          <p:cNvPr id="3" name="TextBox 2"/>
+          <p:cNvSpPr txBox="1"/>
+          <p:nvPr/>
+        </p:nvSpPr>
+        <p:spPr>
+          <a:xfrm>
+            <a:off x="640080" y="3845052"/>
+            <a:ext cx="10911535" cy="310896"/>
+          </a:xfrm>
+          <a:prstGeom prst="rect">
+            <a:avLst/>
+          </a:prstGeom>
+          <a:noFill/>
+        </p:spPr>
+        <p:txBody>
+          <a:bodyPr wrap="square">
+            <a:spAutoFit/>
+          </a:bodyPr>
+          <a:lstStyle/>
+          <a:p>
+            <a:pPr algn="ctr"/>
+            <a:r>
+              <a:rPr sz="2000" b="0" i="0">
+                <a:solidFill>
+                  <a:srgbClr val="828282"/>
+                </a:solidFill>
+                <a:latin typeface="Arial"/>
+              </a:rPr>
+              <a:t>玉座の子羊</a:t>
+            </a:r>
+          </a:p>
+        </p:txBody>
+      </p:sp>
     </p:spTree>
   </p:cSld>
   <p:clrMapOvr>
@@ -5400,6 +5820,41 @@
           </a:p>
         </p:txBody>
       </p:sp>
+      <p:sp>
+        <p:nvSpPr>
+          <p:cNvPr id="3" name="TextBox 2"/>
+          <p:cNvSpPr txBox="1"/>
+          <p:nvPr/>
+        </p:nvSpPr>
+        <p:spPr>
+          <a:xfrm>
+            <a:off x="640080" y="3845052"/>
+            <a:ext cx="10911535" cy="310896"/>
+          </a:xfrm>
+          <a:prstGeom prst="rect">
+            <a:avLst/>
+          </a:prstGeom>
+          <a:noFill/>
+        </p:spPr>
+        <p:txBody>
+          <a:bodyPr wrap="square">
+            <a:spAutoFit/>
+          </a:bodyPr>
+          <a:lstStyle/>
+          <a:p>
+            <a:pPr algn="ctr"/>
+            <a:r>
+              <a:rPr sz="2000" b="0" i="0">
+                <a:solidFill>
+                  <a:srgbClr val="828282"/>
+                </a:solidFill>
+                <a:latin typeface="Arial"/>
+              </a:rPr>
+              <a:t>天の音楽が</a:t>
+            </a:r>
+          </a:p>
+        </p:txBody>
+      </p:sp>
     </p:spTree>
   </p:cSld>
   <p:clrMapOvr>
@@ -5627,6 +6082,76 @@
           </a:p>
         </p:txBody>
       </p:sp>
+      <p:sp>
+        <p:nvSpPr>
+          <p:cNvPr id="4" name="TextBox 3"/>
+          <p:cNvSpPr txBox="1"/>
+          <p:nvPr/>
+        </p:nvSpPr>
+        <p:spPr>
+          <a:xfrm>
+            <a:off x="640080" y="4128516"/>
+            <a:ext cx="10911535" cy="310896"/>
+          </a:xfrm>
+          <a:prstGeom prst="rect">
+            <a:avLst/>
+          </a:prstGeom>
+          <a:noFill/>
+        </p:spPr>
+        <p:txBody>
+          <a:bodyPr wrap="square">
+            <a:spAutoFit/>
+          </a:bodyPr>
+          <a:lstStyle/>
+          <a:p>
+            <a:pPr algn="ctr"/>
+            <a:r>
+              <a:rPr sz="2000" b="0" i="0">
+                <a:solidFill>
+                  <a:srgbClr val="828282"/>
+                </a:solidFill>
+                <a:latin typeface="Arial"/>
+              </a:rPr>
+              <a:t>その御名の周りに響き渡る</a:t>
+            </a:r>
+          </a:p>
+        </p:txBody>
+      </p:sp>
+      <p:sp>
+        <p:nvSpPr>
+          <p:cNvPr id="5" name="TextBox 4"/>
+          <p:cNvSpPr txBox="1"/>
+          <p:nvPr/>
+        </p:nvSpPr>
+        <p:spPr>
+          <a:xfrm>
+            <a:off x="640080" y="4494276"/>
+            <a:ext cx="10911535" cy="310896"/>
+          </a:xfrm>
+          <a:prstGeom prst="rect">
+            <a:avLst/>
+          </a:prstGeom>
+          <a:noFill/>
+        </p:spPr>
+        <p:txBody>
+          <a:bodyPr wrap="square">
+            <a:spAutoFit/>
+          </a:bodyPr>
+          <a:lstStyle/>
+          <a:p>
+            <a:pPr algn="ctr"/>
+            <a:r>
+              <a:rPr sz="2000" b="0" i="0">
+                <a:solidFill>
+                  <a:srgbClr val="828282"/>
+                </a:solidFill>
+                <a:latin typeface="Arial"/>
+              </a:rPr>
+              <a:t>多くの冠でお戴冠させよ</a:t>
+            </a:r>
+          </a:p>
+        </p:txBody>
+      </p:sp>
     </p:spTree>
   </p:cSld>
   <p:clrMapOvr>
@@ -5719,6 +6244,76 @@
                 <a:latin typeface="Arial"/>
               </a:rPr>
               <a:t>Desperta, minha alma, e canta</a:t>
+            </a:r>
+          </a:p>
+        </p:txBody>
+      </p:sp>
+      <p:sp>
+        <p:nvSpPr>
+          <p:cNvPr id="4" name="TextBox 3"/>
+          <p:cNvSpPr txBox="1"/>
+          <p:nvPr/>
+        </p:nvSpPr>
+        <p:spPr>
+          <a:xfrm>
+            <a:off x="640080" y="4128516"/>
+            <a:ext cx="10911535" cy="310896"/>
+          </a:xfrm>
+          <a:prstGeom prst="rect">
+            <a:avLst/>
+          </a:prstGeom>
+          <a:noFill/>
+        </p:spPr>
+        <p:txBody>
+          <a:bodyPr wrap="square">
+            <a:spAutoFit/>
+          </a:bodyPr>
+          <a:lstStyle/>
+          <a:p>
+            <a:pPr algn="ctr"/>
+            <a:r>
+              <a:rPr sz="2000" b="0" i="0">
+                <a:solidFill>
+                  <a:srgbClr val="828282"/>
+                </a:solidFill>
+                <a:latin typeface="Arial"/>
+              </a:rPr>
+              <a:t>玉座の子羊</a:t>
+            </a:r>
+          </a:p>
+        </p:txBody>
+      </p:sp>
+      <p:sp>
+        <p:nvSpPr>
+          <p:cNvPr id="5" name="TextBox 4"/>
+          <p:cNvSpPr txBox="1"/>
+          <p:nvPr/>
+        </p:nvSpPr>
+        <p:spPr>
+          <a:xfrm>
+            <a:off x="640080" y="4494276"/>
+            <a:ext cx="10911535" cy="310896"/>
+          </a:xfrm>
+          <a:prstGeom prst="rect">
+            <a:avLst/>
+          </a:prstGeom>
+          <a:noFill/>
+        </p:spPr>
+        <p:txBody>
+          <a:bodyPr wrap="square">
+            <a:spAutoFit/>
+          </a:bodyPr>
+          <a:lstStyle/>
+          <a:p>
+            <a:pPr algn="ctr"/>
+            <a:r>
+              <a:rPr sz="2000" b="0" i="0">
+                <a:solidFill>
+                  <a:srgbClr val="828282"/>
+                </a:solidFill>
+                <a:latin typeface="Arial"/>
+              </a:rPr>
+              <a:t>わが魂よ、目覚めて歌え</a:t>
             </a:r>
           </a:p>
         </p:txBody>
